--- a/А-В_тест_анализ_Marketpele_Feed/AB-test Marketpele Feed.pptx
+++ b/А-В_тест_анализ_Marketpele_Feed/AB-test Marketpele Feed.pptx
@@ -8,7 +8,10 @@
     <p:sldId id="256" r:id="rId2"/>
     <p:sldId id="257" r:id="rId3"/>
     <p:sldId id="258" r:id="rId4"/>
-    <p:sldId id="259" r:id="rId5"/>
+    <p:sldId id="260" r:id="rId5"/>
+    <p:sldId id="261" r:id="rId6"/>
+    <p:sldId id="262" r:id="rId7"/>
+    <p:sldId id="259" r:id="rId8"/>
   </p:sldIdLst>
   <p:sldSz cx="12192000" cy="6858000"/>
   <p:notesSz cx="6858000" cy="9144000"/>
@@ -107,6 +110,11 @@
       </a:defRPr>
     </a:lvl9pPr>
   </p:defaultTextStyle>
+  <p:extLst>
+    <p:ext uri="{EFAFB233-063F-42B5-8137-9DF3F51BA10A}">
+      <p15:sldGuideLst xmlns:p15="http://schemas.microsoft.com/office/powerpoint/2012/main"/>
+    </p:ext>
+  </p:extLst>
 </p:presentation>
 </file>
 
@@ -833,7 +841,7 @@
             <a:fld id="{B61BEF0D-F0BB-DE4B-95CE-6DB70DBA9567}" type="datetimeFigureOut">
               <a:rPr lang="en-US" dirty="0"/>
               <a:pPr/>
-              <a:t>4/17/2026</a:t>
+              <a:t>4/21/2026</a:t>
             </a:fld>
             <a:endParaRPr lang="en-US" dirty="0"/>
           </a:p>
@@ -1081,7 +1089,7 @@
             <a:fld id="{B61BEF0D-F0BB-DE4B-95CE-6DB70DBA9567}" type="datetimeFigureOut">
               <a:rPr lang="en-US" dirty="0"/>
               <a:pPr/>
-              <a:t>4/17/2026</a:t>
+              <a:t>4/21/2026</a:t>
             </a:fld>
             <a:endParaRPr lang="en-US" dirty="0"/>
           </a:p>
@@ -1392,7 +1400,7 @@
             <a:fld id="{B61BEF0D-F0BB-DE4B-95CE-6DB70DBA9567}" type="datetimeFigureOut">
               <a:rPr lang="en-US" dirty="0"/>
               <a:pPr/>
-              <a:t>4/17/2026</a:t>
+              <a:t>4/21/2026</a:t>
             </a:fld>
             <a:endParaRPr lang="en-US" dirty="0"/>
           </a:p>
@@ -1730,7 +1738,7 @@
             <a:fld id="{B61BEF0D-F0BB-DE4B-95CE-6DB70DBA9567}" type="datetimeFigureOut">
               <a:rPr lang="en-US" dirty="0"/>
               <a:pPr/>
-              <a:t>4/17/2026</a:t>
+              <a:t>4/21/2026</a:t>
             </a:fld>
             <a:endParaRPr lang="en-US" dirty="0"/>
           </a:p>
@@ -2041,7 +2049,7 @@
             <a:fld id="{B61BEF0D-F0BB-DE4B-95CE-6DB70DBA9567}" type="datetimeFigureOut">
               <a:rPr lang="en-US" dirty="0"/>
               <a:pPr/>
-              <a:t>4/17/2026</a:t>
+              <a:t>4/21/2026</a:t>
             </a:fld>
             <a:endParaRPr lang="en-US" dirty="0"/>
           </a:p>
@@ -2431,7 +2439,7 @@
             <a:fld id="{B61BEF0D-F0BB-DE4B-95CE-6DB70DBA9567}" type="datetimeFigureOut">
               <a:rPr lang="en-US" dirty="0"/>
               <a:pPr/>
-              <a:t>4/17/2026</a:t>
+              <a:t>4/21/2026</a:t>
             </a:fld>
             <a:endParaRPr lang="en-US" dirty="0"/>
           </a:p>
@@ -2597,7 +2605,7 @@
           <a:p>
             <a:fld id="{55C6B4A9-1611-4792-9094-5F34BCA07E0B}" type="datetimeFigureOut">
               <a:rPr lang="en-US" dirty="0"/>
-              <a:t>4/17/2026</a:t>
+              <a:t>4/21/2026</a:t>
             </a:fld>
             <a:endParaRPr lang="en-US" dirty="0"/>
           </a:p>
@@ -2773,7 +2781,7 @@
             <a:fld id="{B61BEF0D-F0BB-DE4B-95CE-6DB70DBA9567}" type="datetimeFigureOut">
               <a:rPr lang="en-US" dirty="0"/>
               <a:pPr/>
-              <a:t>4/17/2026</a:t>
+              <a:t>4/21/2026</a:t>
             </a:fld>
             <a:endParaRPr lang="en-US" dirty="0"/>
           </a:p>
@@ -2946,7 +2954,7 @@
             <a:fld id="{B61BEF0D-F0BB-DE4B-95CE-6DB70DBA9567}" type="datetimeFigureOut">
               <a:rPr lang="en-US" dirty="0"/>
               <a:pPr/>
-              <a:t>4/17/2026</a:t>
+              <a:t>4/21/2026</a:t>
             </a:fld>
             <a:endParaRPr lang="en-US" dirty="0"/>
           </a:p>
@@ -3190,7 +3198,7 @@
             <a:fld id="{B61BEF0D-F0BB-DE4B-95CE-6DB70DBA9567}" type="datetimeFigureOut">
               <a:rPr lang="en-US" dirty="0"/>
               <a:pPr/>
-              <a:t>4/17/2026</a:t>
+              <a:t>4/21/2026</a:t>
             </a:fld>
             <a:endParaRPr lang="en-US" dirty="0"/>
           </a:p>
@@ -3418,7 +3426,7 @@
           <a:p>
             <a:fld id="{EB712588-04B1-427B-82EE-E8DB90309F08}" type="datetimeFigureOut">
               <a:rPr lang="en-US" dirty="0"/>
-              <a:t>4/17/2026</a:t>
+              <a:t>4/21/2026</a:t>
             </a:fld>
             <a:endParaRPr lang="en-US" dirty="0"/>
           </a:p>
@@ -3788,7 +3796,7 @@
             <a:fld id="{B61BEF0D-F0BB-DE4B-95CE-6DB70DBA9567}" type="datetimeFigureOut">
               <a:rPr lang="en-US" dirty="0"/>
               <a:pPr/>
-              <a:t>4/17/2026</a:t>
+              <a:t>4/21/2026</a:t>
             </a:fld>
             <a:endParaRPr lang="en-US" dirty="0"/>
           </a:p>
@@ -3908,7 +3916,7 @@
             <a:fld id="{B61BEF0D-F0BB-DE4B-95CE-6DB70DBA9567}" type="datetimeFigureOut">
               <a:rPr lang="en-US" dirty="0"/>
               <a:pPr/>
-              <a:t>4/17/2026</a:t>
+              <a:t>4/21/2026</a:t>
             </a:fld>
             <a:endParaRPr lang="en-US" dirty="0"/>
           </a:p>
@@ -4000,7 +4008,7 @@
             <a:fld id="{B61BEF0D-F0BB-DE4B-95CE-6DB70DBA9567}" type="datetimeFigureOut">
               <a:rPr lang="en-US" dirty="0"/>
               <a:pPr/>
-              <a:t>4/17/2026</a:t>
+              <a:t>4/21/2026</a:t>
             </a:fld>
             <a:endParaRPr lang="en-US" dirty="0"/>
           </a:p>
@@ -4251,7 +4259,7 @@
           <a:p>
             <a:fld id="{42A54C80-263E-416B-A8E0-580EDEADCBDC}" type="datetimeFigureOut">
               <a:rPr lang="en-US" dirty="0"/>
-              <a:t>4/17/2026</a:t>
+              <a:t>4/21/2026</a:t>
             </a:fld>
             <a:endParaRPr lang="en-US" dirty="0"/>
           </a:p>
@@ -4510,7 +4518,7 @@
             <a:fld id="{B61BEF0D-F0BB-DE4B-95CE-6DB70DBA9567}" type="datetimeFigureOut">
               <a:rPr lang="en-US" dirty="0"/>
               <a:pPr/>
-              <a:t>4/17/2026</a:t>
+              <a:t>4/21/2026</a:t>
             </a:fld>
             <a:endParaRPr lang="en-US" dirty="0"/>
           </a:p>
@@ -5250,7 +5258,7 @@
             <a:fld id="{B61BEF0D-F0BB-DE4B-95CE-6DB70DBA9567}" type="datetimeFigureOut">
               <a:rPr lang="en-US" dirty="0"/>
               <a:pPr/>
-              <a:t>4/17/2026</a:t>
+              <a:t>4/21/2026</a:t>
             </a:fld>
             <a:endParaRPr lang="en-US" dirty="0"/>
           </a:p>
@@ -6239,7 +6247,7 @@
           </a:bodyPr>
           <a:lstStyle/>
           <a:p>
-            <a:pPr marL="0" indent="0">
+            <a:pPr marL="0" indent="0" algn="ctr">
               <a:buNone/>
             </a:pPr>
             <a:r>
@@ -6251,7 +6259,7 @@
                 <a:ea typeface="+mj-ea"/>
                 <a:cs typeface="+mj-cs"/>
               </a:rPr>
-              <a:t>Отличие ключевых метрик</a:t>
+              <a:t>Отличие ключевых метрик по всем платформам</a:t>
             </a:r>
           </a:p>
           <a:p>
@@ -6586,6 +6594,3681 @@
 </file>
 
 <file path=ppt/slides/slide4.xml><?xml version="1.0" encoding="utf-8"?>
+<p:sld xmlns:a="http://schemas.openxmlformats.org/drawingml/2006/main" xmlns:r="http://schemas.openxmlformats.org/officeDocument/2006/relationships" xmlns:p="http://schemas.openxmlformats.org/presentationml/2006/main">
+  <p:cSld>
+    <p:spTree>
+      <p:nvGrpSpPr>
+        <p:cNvPr id="1" name=""/>
+        <p:cNvGrpSpPr/>
+        <p:nvPr/>
+      </p:nvGrpSpPr>
+      <p:grpSpPr>
+        <a:xfrm>
+          <a:off x="0" y="0"/>
+          <a:ext cx="0" cy="0"/>
+          <a:chOff x="0" y="0"/>
+          <a:chExt cx="0" cy="0"/>
+        </a:xfrm>
+      </p:grpSpPr>
+      <p:sp>
+        <p:nvSpPr>
+          <p:cNvPr id="3" name="Объект 2">
+            <a:extLst>
+              <a:ext uri="{FF2B5EF4-FFF2-40B4-BE49-F238E27FC236}">
+                <a16:creationId xmlns:a16="http://schemas.microsoft.com/office/drawing/2014/main" id="{94765F1F-734E-4482-954A-9529C1BE7241}"/>
+              </a:ext>
+            </a:extLst>
+          </p:cNvPr>
+          <p:cNvSpPr>
+            <a:spLocks noGrp="1"/>
+          </p:cNvSpPr>
+          <p:nvPr>
+            <p:ph idx="1"/>
+          </p:nvPr>
+        </p:nvSpPr>
+        <p:spPr>
+          <a:xfrm>
+            <a:off x="436034" y="252739"/>
+            <a:ext cx="9235446" cy="6465561"/>
+          </a:xfrm>
+        </p:spPr>
+        <p:txBody>
+          <a:bodyPr>
+            <a:normAutofit/>
+          </a:bodyPr>
+          <a:lstStyle/>
+          <a:p>
+            <a:pPr marL="0" indent="0" algn="ctr">
+              <a:buNone/>
+            </a:pPr>
+            <a:r>
+              <a:rPr lang="ru-RU" sz="2100" dirty="0">
+                <a:solidFill>
+                  <a:schemeClr val="accent1"/>
+                </a:solidFill>
+                <a:latin typeface="+mj-lt"/>
+                <a:ea typeface="+mj-ea"/>
+                <a:cs typeface="+mj-cs"/>
+              </a:rPr>
+              <a:t>Отличие ключевых метрик по платформе </a:t>
+            </a:r>
+            <a:r>
+              <a:rPr lang="en-US" sz="2100" dirty="0">
+                <a:solidFill>
+                  <a:schemeClr val="accent1"/>
+                </a:solidFill>
+                <a:latin typeface="+mj-lt"/>
+                <a:ea typeface="+mj-ea"/>
+                <a:cs typeface="+mj-cs"/>
+              </a:rPr>
+              <a:t>Desktop</a:t>
+            </a:r>
+            <a:endParaRPr lang="ru-RU" sz="2100" dirty="0">
+              <a:solidFill>
+                <a:schemeClr val="accent1"/>
+              </a:solidFill>
+              <a:latin typeface="+mj-lt"/>
+              <a:ea typeface="+mj-ea"/>
+              <a:cs typeface="+mj-cs"/>
+            </a:endParaRPr>
+          </a:p>
+          <a:p>
+            <a:pPr marL="0" indent="0">
+              <a:buNone/>
+            </a:pPr>
+            <a:endParaRPr lang="ru-RU" sz="2100" dirty="0">
+              <a:solidFill>
+                <a:schemeClr val="accent1"/>
+              </a:solidFill>
+              <a:latin typeface="+mj-lt"/>
+              <a:ea typeface="+mj-ea"/>
+              <a:cs typeface="+mj-cs"/>
+            </a:endParaRPr>
+          </a:p>
+          <a:p>
+            <a:pPr marL="0" indent="0">
+              <a:buNone/>
+            </a:pPr>
+            <a:endParaRPr lang="ru-RU" sz="2100" dirty="0">
+              <a:solidFill>
+                <a:schemeClr val="accent1"/>
+              </a:solidFill>
+              <a:latin typeface="+mj-lt"/>
+              <a:ea typeface="+mj-ea"/>
+              <a:cs typeface="+mj-cs"/>
+            </a:endParaRPr>
+          </a:p>
+          <a:p>
+            <a:pPr marL="0" indent="0">
+              <a:buNone/>
+            </a:pPr>
+            <a:endParaRPr lang="ru-RU" sz="2100" dirty="0">
+              <a:solidFill>
+                <a:schemeClr val="accent1"/>
+              </a:solidFill>
+              <a:latin typeface="+mj-lt"/>
+              <a:ea typeface="+mj-ea"/>
+              <a:cs typeface="+mj-cs"/>
+            </a:endParaRPr>
+          </a:p>
+          <a:p>
+            <a:pPr marL="0" indent="0">
+              <a:buNone/>
+            </a:pPr>
+            <a:endParaRPr lang="ru-RU" sz="2100" dirty="0">
+              <a:solidFill>
+                <a:schemeClr val="accent1"/>
+              </a:solidFill>
+              <a:latin typeface="+mj-lt"/>
+              <a:ea typeface="+mj-ea"/>
+              <a:cs typeface="+mj-cs"/>
+            </a:endParaRPr>
+          </a:p>
+          <a:p>
+            <a:pPr marL="0" indent="0">
+              <a:buNone/>
+            </a:pPr>
+            <a:endParaRPr lang="ru-RU" sz="2100" dirty="0">
+              <a:solidFill>
+                <a:schemeClr val="accent1"/>
+              </a:solidFill>
+              <a:latin typeface="+mj-lt"/>
+              <a:ea typeface="+mj-ea"/>
+              <a:cs typeface="+mj-cs"/>
+            </a:endParaRPr>
+          </a:p>
+          <a:p>
+            <a:pPr marL="0" indent="0">
+              <a:buNone/>
+            </a:pPr>
+            <a:endParaRPr lang="ru-RU" sz="2100" dirty="0">
+              <a:solidFill>
+                <a:schemeClr val="accent1"/>
+              </a:solidFill>
+              <a:latin typeface="+mj-lt"/>
+              <a:ea typeface="+mj-ea"/>
+              <a:cs typeface="+mj-cs"/>
+            </a:endParaRPr>
+          </a:p>
+          <a:p>
+            <a:pPr marL="0" indent="0">
+              <a:buNone/>
+            </a:pPr>
+            <a:endParaRPr lang="ru-RU" sz="2100" dirty="0">
+              <a:solidFill>
+                <a:schemeClr val="accent1"/>
+              </a:solidFill>
+              <a:latin typeface="+mj-lt"/>
+              <a:ea typeface="+mj-ea"/>
+              <a:cs typeface="+mj-cs"/>
+            </a:endParaRPr>
+          </a:p>
+          <a:p>
+            <a:pPr marL="0" indent="0">
+              <a:buNone/>
+            </a:pPr>
+            <a:endParaRPr lang="ru-RU" sz="2100" dirty="0">
+              <a:solidFill>
+                <a:schemeClr val="accent1"/>
+              </a:solidFill>
+              <a:latin typeface="+mj-lt"/>
+              <a:ea typeface="+mj-ea"/>
+              <a:cs typeface="+mj-cs"/>
+            </a:endParaRPr>
+          </a:p>
+          <a:p>
+            <a:pPr marL="0" indent="0">
+              <a:buNone/>
+            </a:pPr>
+            <a:endParaRPr lang="ru-RU" sz="2100" dirty="0">
+              <a:solidFill>
+                <a:schemeClr val="accent1"/>
+              </a:solidFill>
+              <a:latin typeface="+mj-lt"/>
+              <a:ea typeface="+mj-ea"/>
+              <a:cs typeface="+mj-cs"/>
+            </a:endParaRPr>
+          </a:p>
+          <a:p>
+            <a:pPr marL="0" indent="0">
+              <a:buNone/>
+            </a:pPr>
+            <a:endParaRPr lang="ru-RU" sz="2100" dirty="0">
+              <a:solidFill>
+                <a:schemeClr val="accent1"/>
+              </a:solidFill>
+              <a:latin typeface="+mj-lt"/>
+              <a:ea typeface="+mj-ea"/>
+              <a:cs typeface="+mj-cs"/>
+            </a:endParaRPr>
+          </a:p>
+          <a:p>
+            <a:pPr marL="0" indent="0">
+              <a:buNone/>
+            </a:pPr>
+            <a:endParaRPr lang="ru-RU" sz="2100" dirty="0">
+              <a:solidFill>
+                <a:schemeClr val="accent1"/>
+              </a:solidFill>
+              <a:latin typeface="+mj-lt"/>
+              <a:ea typeface="+mj-ea"/>
+              <a:cs typeface="+mj-cs"/>
+            </a:endParaRPr>
+          </a:p>
+          <a:p>
+            <a:pPr marL="0" indent="0">
+              <a:buNone/>
+            </a:pPr>
+            <a:endParaRPr lang="ru-RU" sz="1400" dirty="0"/>
+          </a:p>
+          <a:p>
+            <a:pPr marL="0" indent="0">
+              <a:spcBef>
+                <a:spcPts val="0"/>
+              </a:spcBef>
+              <a:buNone/>
+            </a:pPr>
+            <a:endParaRPr lang="en-US" sz="1400" dirty="0">
+              <a:solidFill>
+                <a:schemeClr val="tx1"/>
+              </a:solidFill>
+            </a:endParaRPr>
+          </a:p>
+          <a:p>
+            <a:pPr marL="0" indent="0">
+              <a:spcBef>
+                <a:spcPts val="0"/>
+              </a:spcBef>
+              <a:buNone/>
+            </a:pPr>
+            <a:r>
+              <a:rPr lang="ru-RU" sz="1400" dirty="0">
+                <a:solidFill>
+                  <a:schemeClr val="tx1"/>
+                </a:solidFill>
+              </a:rPr>
+              <a:t>Ключевые метрики RPM, RPS, </a:t>
+            </a:r>
+            <a:r>
+              <a:rPr lang="ru-RU" sz="1400" dirty="0" err="1">
+                <a:solidFill>
+                  <a:schemeClr val="tx1"/>
+                </a:solidFill>
+              </a:rPr>
+              <a:t>Paid</a:t>
+            </a:r>
+            <a:r>
+              <a:rPr lang="ru-RU" sz="1400" dirty="0">
+                <a:solidFill>
+                  <a:schemeClr val="tx1"/>
+                </a:solidFill>
+              </a:rPr>
+              <a:t> CTR  в группах статически значимо не изменились.</a:t>
+            </a:r>
+          </a:p>
+          <a:p>
+            <a:pPr marL="0" indent="0">
+              <a:spcBef>
+                <a:spcPts val="0"/>
+              </a:spcBef>
+              <a:buNone/>
+            </a:pPr>
+            <a:r>
+              <a:rPr lang="ru-RU" sz="1400" dirty="0">
+                <a:solidFill>
+                  <a:schemeClr val="tx1"/>
+                </a:solidFill>
+              </a:rPr>
+              <a:t>Метрика </a:t>
+            </a:r>
+            <a:r>
+              <a:rPr lang="ru-RU" sz="1400" dirty="0" err="1">
+                <a:solidFill>
+                  <a:schemeClr val="tx1"/>
+                </a:solidFill>
+              </a:rPr>
+              <a:t>Organic</a:t>
+            </a:r>
+            <a:r>
+              <a:rPr lang="ru-RU" sz="1400" dirty="0">
+                <a:solidFill>
+                  <a:schemeClr val="tx1"/>
+                </a:solidFill>
+              </a:rPr>
+              <a:t> CTR в группе B </a:t>
+            </a:r>
+            <a:r>
+              <a:rPr lang="ru-RU" sz="1400" dirty="0">
+                <a:solidFill>
+                  <a:schemeClr val="accent5">
+                    <a:lumMod val="60000"/>
+                    <a:lumOff val="40000"/>
+                  </a:schemeClr>
+                </a:solidFill>
+              </a:rPr>
+              <a:t>значительно снизилась.</a:t>
+            </a:r>
+            <a:r>
+              <a:rPr lang="ru-RU" dirty="0">
+                <a:solidFill>
+                  <a:schemeClr val="accent5">
+                    <a:lumMod val="60000"/>
+                    <a:lumOff val="40000"/>
+                  </a:schemeClr>
+                </a:solidFill>
+              </a:rPr>
+              <a:t> </a:t>
+            </a:r>
+            <a:endParaRPr lang="ru-RU" sz="1400" dirty="0">
+              <a:solidFill>
+                <a:schemeClr val="accent5">
+                  <a:lumMod val="60000"/>
+                  <a:lumOff val="40000"/>
+                </a:schemeClr>
+              </a:solidFill>
+            </a:endParaRPr>
+          </a:p>
+          <a:p>
+            <a:pPr marL="0" indent="0">
+              <a:buNone/>
+            </a:pPr>
+            <a:endParaRPr lang="ru-RU" sz="2100" dirty="0">
+              <a:solidFill>
+                <a:schemeClr val="accent1"/>
+              </a:solidFill>
+              <a:latin typeface="+mj-lt"/>
+              <a:ea typeface="+mj-ea"/>
+              <a:cs typeface="+mj-cs"/>
+            </a:endParaRPr>
+          </a:p>
+        </p:txBody>
+      </p:sp>
+      <p:pic>
+        <p:nvPicPr>
+          <p:cNvPr id="2" name="Рисунок 1">
+            <a:extLst>
+              <a:ext uri="{FF2B5EF4-FFF2-40B4-BE49-F238E27FC236}">
+                <a16:creationId xmlns:a16="http://schemas.microsoft.com/office/drawing/2014/main" id="{B1450F50-D381-4D6D-9ACB-7454B6B27272}"/>
+              </a:ext>
+            </a:extLst>
+          </p:cNvPr>
+          <p:cNvPicPr>
+            <a:picLocks noChangeAspect="1"/>
+          </p:cNvPicPr>
+          <p:nvPr/>
+        </p:nvPicPr>
+        <p:blipFill>
+          <a:blip r:embed="rId2"/>
+          <a:stretch>
+            <a:fillRect/>
+          </a:stretch>
+        </p:blipFill>
+        <p:spPr>
+          <a:xfrm>
+            <a:off x="1231900" y="814966"/>
+            <a:ext cx="7418114" cy="5228068"/>
+          </a:xfrm>
+          <a:prstGeom prst="rect">
+            <a:avLst/>
+          </a:prstGeom>
+        </p:spPr>
+      </p:pic>
+    </p:spTree>
+    <p:extLst>
+      <p:ext uri="{BB962C8B-B14F-4D97-AF65-F5344CB8AC3E}">
+        <p14:creationId xmlns:p14="http://schemas.microsoft.com/office/powerpoint/2010/main" val="2704319546"/>
+      </p:ext>
+    </p:extLst>
+  </p:cSld>
+  <p:clrMapOvr>
+    <a:masterClrMapping/>
+  </p:clrMapOvr>
+</p:sld>
+</file>
+
+<file path=ppt/slides/slide5.xml><?xml version="1.0" encoding="utf-8"?>
+<p:sld xmlns:a="http://schemas.openxmlformats.org/drawingml/2006/main" xmlns:r="http://schemas.openxmlformats.org/officeDocument/2006/relationships" xmlns:p="http://schemas.openxmlformats.org/presentationml/2006/main">
+  <p:cSld>
+    <p:spTree>
+      <p:nvGrpSpPr>
+        <p:cNvPr id="1" name=""/>
+        <p:cNvGrpSpPr/>
+        <p:nvPr/>
+      </p:nvGrpSpPr>
+      <p:grpSpPr>
+        <a:xfrm>
+          <a:off x="0" y="0"/>
+          <a:ext cx="0" cy="0"/>
+          <a:chOff x="0" y="0"/>
+          <a:chExt cx="0" cy="0"/>
+        </a:xfrm>
+      </p:grpSpPr>
+      <p:sp>
+        <p:nvSpPr>
+          <p:cNvPr id="3" name="Объект 2">
+            <a:extLst>
+              <a:ext uri="{FF2B5EF4-FFF2-40B4-BE49-F238E27FC236}">
+                <a16:creationId xmlns:a16="http://schemas.microsoft.com/office/drawing/2014/main" id="{94765F1F-734E-4482-954A-9529C1BE7241}"/>
+              </a:ext>
+            </a:extLst>
+          </p:cNvPr>
+          <p:cNvSpPr>
+            <a:spLocks noGrp="1"/>
+          </p:cNvSpPr>
+          <p:nvPr>
+            <p:ph idx="1"/>
+          </p:nvPr>
+        </p:nvSpPr>
+        <p:spPr>
+          <a:xfrm>
+            <a:off x="436034" y="252739"/>
+            <a:ext cx="9235446" cy="6465561"/>
+          </a:xfrm>
+        </p:spPr>
+        <p:txBody>
+          <a:bodyPr>
+            <a:normAutofit/>
+          </a:bodyPr>
+          <a:lstStyle/>
+          <a:p>
+            <a:pPr marL="0" indent="0" algn="ctr">
+              <a:buNone/>
+            </a:pPr>
+            <a:r>
+              <a:rPr lang="ru-RU" sz="2100" dirty="0">
+                <a:solidFill>
+                  <a:schemeClr val="accent1"/>
+                </a:solidFill>
+                <a:latin typeface="+mj-lt"/>
+                <a:ea typeface="+mj-ea"/>
+                <a:cs typeface="+mj-cs"/>
+              </a:rPr>
+              <a:t>Отличие ключевых метрик по платформе </a:t>
+            </a:r>
+            <a:r>
+              <a:rPr lang="en-US" sz="2100" dirty="0">
+                <a:solidFill>
+                  <a:schemeClr val="accent1"/>
+                </a:solidFill>
+                <a:latin typeface="+mj-lt"/>
+                <a:ea typeface="+mj-ea"/>
+                <a:cs typeface="+mj-cs"/>
+              </a:rPr>
+              <a:t>Mobile</a:t>
+            </a:r>
+            <a:endParaRPr lang="ru-RU" sz="2100" dirty="0">
+              <a:solidFill>
+                <a:schemeClr val="accent1"/>
+              </a:solidFill>
+              <a:latin typeface="+mj-lt"/>
+              <a:ea typeface="+mj-ea"/>
+              <a:cs typeface="+mj-cs"/>
+            </a:endParaRPr>
+          </a:p>
+          <a:p>
+            <a:pPr marL="0" indent="0">
+              <a:buNone/>
+            </a:pPr>
+            <a:endParaRPr lang="ru-RU" sz="2100" dirty="0">
+              <a:solidFill>
+                <a:schemeClr val="accent1"/>
+              </a:solidFill>
+              <a:latin typeface="+mj-lt"/>
+              <a:ea typeface="+mj-ea"/>
+              <a:cs typeface="+mj-cs"/>
+            </a:endParaRPr>
+          </a:p>
+          <a:p>
+            <a:pPr marL="0" indent="0">
+              <a:buNone/>
+            </a:pPr>
+            <a:endParaRPr lang="ru-RU" sz="2100" dirty="0">
+              <a:solidFill>
+                <a:schemeClr val="accent1"/>
+              </a:solidFill>
+              <a:latin typeface="+mj-lt"/>
+              <a:ea typeface="+mj-ea"/>
+              <a:cs typeface="+mj-cs"/>
+            </a:endParaRPr>
+          </a:p>
+          <a:p>
+            <a:pPr marL="0" indent="0">
+              <a:buNone/>
+            </a:pPr>
+            <a:endParaRPr lang="ru-RU" sz="2100" dirty="0">
+              <a:solidFill>
+                <a:schemeClr val="accent1"/>
+              </a:solidFill>
+              <a:latin typeface="+mj-lt"/>
+              <a:ea typeface="+mj-ea"/>
+              <a:cs typeface="+mj-cs"/>
+            </a:endParaRPr>
+          </a:p>
+          <a:p>
+            <a:pPr marL="0" indent="0">
+              <a:buNone/>
+            </a:pPr>
+            <a:endParaRPr lang="ru-RU" sz="2100" dirty="0">
+              <a:solidFill>
+                <a:schemeClr val="accent1"/>
+              </a:solidFill>
+              <a:latin typeface="+mj-lt"/>
+              <a:ea typeface="+mj-ea"/>
+              <a:cs typeface="+mj-cs"/>
+            </a:endParaRPr>
+          </a:p>
+          <a:p>
+            <a:pPr marL="0" indent="0">
+              <a:buNone/>
+            </a:pPr>
+            <a:endParaRPr lang="ru-RU" sz="2100" dirty="0">
+              <a:solidFill>
+                <a:schemeClr val="accent1"/>
+              </a:solidFill>
+              <a:latin typeface="+mj-lt"/>
+              <a:ea typeface="+mj-ea"/>
+              <a:cs typeface="+mj-cs"/>
+            </a:endParaRPr>
+          </a:p>
+          <a:p>
+            <a:pPr marL="0" indent="0">
+              <a:buNone/>
+            </a:pPr>
+            <a:endParaRPr lang="ru-RU" sz="2100" dirty="0">
+              <a:solidFill>
+                <a:schemeClr val="accent1"/>
+              </a:solidFill>
+              <a:latin typeface="+mj-lt"/>
+              <a:ea typeface="+mj-ea"/>
+              <a:cs typeface="+mj-cs"/>
+            </a:endParaRPr>
+          </a:p>
+          <a:p>
+            <a:pPr marL="0" indent="0">
+              <a:buNone/>
+            </a:pPr>
+            <a:endParaRPr lang="ru-RU" sz="2100" dirty="0">
+              <a:solidFill>
+                <a:schemeClr val="accent1"/>
+              </a:solidFill>
+              <a:latin typeface="+mj-lt"/>
+              <a:ea typeface="+mj-ea"/>
+              <a:cs typeface="+mj-cs"/>
+            </a:endParaRPr>
+          </a:p>
+          <a:p>
+            <a:pPr marL="0" indent="0">
+              <a:buNone/>
+            </a:pPr>
+            <a:endParaRPr lang="ru-RU" sz="2100" dirty="0">
+              <a:solidFill>
+                <a:schemeClr val="accent1"/>
+              </a:solidFill>
+              <a:latin typeface="+mj-lt"/>
+              <a:ea typeface="+mj-ea"/>
+              <a:cs typeface="+mj-cs"/>
+            </a:endParaRPr>
+          </a:p>
+          <a:p>
+            <a:pPr marL="0" indent="0">
+              <a:buNone/>
+            </a:pPr>
+            <a:endParaRPr lang="ru-RU" sz="2100" dirty="0">
+              <a:solidFill>
+                <a:schemeClr val="accent1"/>
+              </a:solidFill>
+              <a:latin typeface="+mj-lt"/>
+              <a:ea typeface="+mj-ea"/>
+              <a:cs typeface="+mj-cs"/>
+            </a:endParaRPr>
+          </a:p>
+          <a:p>
+            <a:pPr marL="0" indent="0">
+              <a:buNone/>
+            </a:pPr>
+            <a:endParaRPr lang="ru-RU" sz="2100" dirty="0">
+              <a:solidFill>
+                <a:schemeClr val="accent1"/>
+              </a:solidFill>
+              <a:latin typeface="+mj-lt"/>
+              <a:ea typeface="+mj-ea"/>
+              <a:cs typeface="+mj-cs"/>
+            </a:endParaRPr>
+          </a:p>
+          <a:p>
+            <a:pPr marL="0" indent="0">
+              <a:buNone/>
+            </a:pPr>
+            <a:endParaRPr lang="ru-RU" sz="2100" dirty="0">
+              <a:solidFill>
+                <a:schemeClr val="accent1"/>
+              </a:solidFill>
+              <a:latin typeface="+mj-lt"/>
+              <a:ea typeface="+mj-ea"/>
+              <a:cs typeface="+mj-cs"/>
+            </a:endParaRPr>
+          </a:p>
+          <a:p>
+            <a:pPr marL="0" indent="0">
+              <a:buNone/>
+            </a:pPr>
+            <a:endParaRPr lang="ru-RU" sz="1400" dirty="0"/>
+          </a:p>
+          <a:p>
+            <a:pPr marL="0" indent="0">
+              <a:spcBef>
+                <a:spcPts val="0"/>
+              </a:spcBef>
+              <a:buNone/>
+            </a:pPr>
+            <a:endParaRPr lang="en-US" sz="1400" dirty="0">
+              <a:solidFill>
+                <a:schemeClr val="tx1"/>
+              </a:solidFill>
+            </a:endParaRPr>
+          </a:p>
+          <a:p>
+            <a:pPr marL="0" indent="0">
+              <a:spcBef>
+                <a:spcPts val="0"/>
+              </a:spcBef>
+              <a:buNone/>
+            </a:pPr>
+            <a:r>
+              <a:rPr lang="ru-RU" sz="1400" dirty="0">
+                <a:solidFill>
+                  <a:schemeClr val="tx1"/>
+                </a:solidFill>
+              </a:rPr>
+              <a:t>Ключевые метрики RPM, RPS, </a:t>
+            </a:r>
+            <a:r>
+              <a:rPr lang="ru-RU" sz="1400" dirty="0" err="1">
+                <a:solidFill>
+                  <a:schemeClr val="tx1"/>
+                </a:solidFill>
+              </a:rPr>
+              <a:t>Paid</a:t>
+            </a:r>
+            <a:r>
+              <a:rPr lang="ru-RU" sz="1400" dirty="0">
+                <a:solidFill>
+                  <a:schemeClr val="tx1"/>
+                </a:solidFill>
+              </a:rPr>
+              <a:t> CTR  в группах статически значимо не изменились.</a:t>
+            </a:r>
+          </a:p>
+          <a:p>
+            <a:pPr marL="0" indent="0">
+              <a:spcBef>
+                <a:spcPts val="0"/>
+              </a:spcBef>
+              <a:buNone/>
+            </a:pPr>
+            <a:r>
+              <a:rPr lang="ru-RU" sz="1400" dirty="0">
+                <a:solidFill>
+                  <a:schemeClr val="tx1"/>
+                </a:solidFill>
+              </a:rPr>
+              <a:t>Метрика </a:t>
+            </a:r>
+            <a:r>
+              <a:rPr lang="ru-RU" sz="1400" dirty="0" err="1">
+                <a:solidFill>
+                  <a:schemeClr val="tx1"/>
+                </a:solidFill>
+              </a:rPr>
+              <a:t>Organic</a:t>
+            </a:r>
+            <a:r>
+              <a:rPr lang="ru-RU" sz="1400" dirty="0">
+                <a:solidFill>
+                  <a:schemeClr val="tx1"/>
+                </a:solidFill>
+              </a:rPr>
+              <a:t> CTR в группе B </a:t>
+            </a:r>
+            <a:r>
+              <a:rPr lang="ru-RU" sz="1400" dirty="0">
+                <a:solidFill>
+                  <a:schemeClr val="accent5">
+                    <a:lumMod val="60000"/>
+                    <a:lumOff val="40000"/>
+                  </a:schemeClr>
+                </a:solidFill>
+              </a:rPr>
+              <a:t>значительно снизилась.</a:t>
+            </a:r>
+            <a:r>
+              <a:rPr lang="ru-RU" dirty="0">
+                <a:solidFill>
+                  <a:schemeClr val="accent5">
+                    <a:lumMod val="60000"/>
+                    <a:lumOff val="40000"/>
+                  </a:schemeClr>
+                </a:solidFill>
+              </a:rPr>
+              <a:t> </a:t>
+            </a:r>
+            <a:endParaRPr lang="ru-RU" sz="1400" dirty="0">
+              <a:solidFill>
+                <a:schemeClr val="accent5">
+                  <a:lumMod val="60000"/>
+                  <a:lumOff val="40000"/>
+                </a:schemeClr>
+              </a:solidFill>
+            </a:endParaRPr>
+          </a:p>
+          <a:p>
+            <a:pPr marL="0" indent="0">
+              <a:buNone/>
+            </a:pPr>
+            <a:endParaRPr lang="ru-RU" sz="2100" dirty="0">
+              <a:solidFill>
+                <a:schemeClr val="accent1"/>
+              </a:solidFill>
+              <a:latin typeface="+mj-lt"/>
+              <a:ea typeface="+mj-ea"/>
+              <a:cs typeface="+mj-cs"/>
+            </a:endParaRPr>
+          </a:p>
+        </p:txBody>
+      </p:sp>
+      <p:pic>
+        <p:nvPicPr>
+          <p:cNvPr id="4" name="Рисунок 3">
+            <a:extLst>
+              <a:ext uri="{FF2B5EF4-FFF2-40B4-BE49-F238E27FC236}">
+                <a16:creationId xmlns:a16="http://schemas.microsoft.com/office/drawing/2014/main" id="{380CCAF2-D475-49FE-87FB-A05B2D75B9E1}"/>
+              </a:ext>
+            </a:extLst>
+          </p:cNvPr>
+          <p:cNvPicPr>
+            <a:picLocks noChangeAspect="1"/>
+          </p:cNvPicPr>
+          <p:nvPr/>
+        </p:nvPicPr>
+        <p:blipFill>
+          <a:blip r:embed="rId2"/>
+          <a:stretch>
+            <a:fillRect/>
+          </a:stretch>
+        </p:blipFill>
+        <p:spPr>
+          <a:xfrm>
+            <a:off x="1117601" y="606554"/>
+            <a:ext cx="7658100" cy="5467091"/>
+          </a:xfrm>
+          <a:prstGeom prst="rect">
+            <a:avLst/>
+          </a:prstGeom>
+        </p:spPr>
+      </p:pic>
+    </p:spTree>
+    <p:extLst>
+      <p:ext uri="{BB962C8B-B14F-4D97-AF65-F5344CB8AC3E}">
+        <p14:creationId xmlns:p14="http://schemas.microsoft.com/office/powerpoint/2010/main" val="2090805245"/>
+      </p:ext>
+    </p:extLst>
+  </p:cSld>
+  <p:clrMapOvr>
+    <a:masterClrMapping/>
+  </p:clrMapOvr>
+</p:sld>
+</file>
+
+<file path=ppt/slides/slide6.xml><?xml version="1.0" encoding="utf-8"?>
+<p:sld xmlns:a="http://schemas.openxmlformats.org/drawingml/2006/main" xmlns:r="http://schemas.openxmlformats.org/officeDocument/2006/relationships" xmlns:p="http://schemas.openxmlformats.org/presentationml/2006/main">
+  <p:cSld>
+    <p:spTree>
+      <p:nvGrpSpPr>
+        <p:cNvPr id="1" name=""/>
+        <p:cNvGrpSpPr/>
+        <p:nvPr/>
+      </p:nvGrpSpPr>
+      <p:grpSpPr>
+        <a:xfrm>
+          <a:off x="0" y="0"/>
+          <a:ext cx="0" cy="0"/>
+          <a:chOff x="0" y="0"/>
+          <a:chExt cx="0" cy="0"/>
+        </a:xfrm>
+      </p:grpSpPr>
+      <p:sp>
+        <p:nvSpPr>
+          <p:cNvPr id="3" name="Объект 2">
+            <a:extLst>
+              <a:ext uri="{FF2B5EF4-FFF2-40B4-BE49-F238E27FC236}">
+                <a16:creationId xmlns:a16="http://schemas.microsoft.com/office/drawing/2014/main" id="{94765F1F-734E-4482-954A-9529C1BE7241}"/>
+              </a:ext>
+            </a:extLst>
+          </p:cNvPr>
+          <p:cNvSpPr>
+            <a:spLocks noGrp="1"/>
+          </p:cNvSpPr>
+          <p:nvPr>
+            <p:ph idx="1"/>
+          </p:nvPr>
+        </p:nvSpPr>
+        <p:spPr>
+          <a:xfrm>
+            <a:off x="436034" y="252739"/>
+            <a:ext cx="9235446" cy="6465561"/>
+          </a:xfrm>
+        </p:spPr>
+        <p:txBody>
+          <a:bodyPr>
+            <a:normAutofit/>
+          </a:bodyPr>
+          <a:lstStyle/>
+          <a:p>
+            <a:pPr marL="0" indent="0" algn="ctr">
+              <a:buNone/>
+            </a:pPr>
+            <a:r>
+              <a:rPr lang="ru-RU" sz="2100" dirty="0">
+                <a:solidFill>
+                  <a:schemeClr val="accent1"/>
+                </a:solidFill>
+                <a:latin typeface="+mj-lt"/>
+                <a:ea typeface="+mj-ea"/>
+                <a:cs typeface="+mj-cs"/>
+              </a:rPr>
+              <a:t>Сводная таблица</a:t>
+            </a:r>
+          </a:p>
+          <a:p>
+            <a:pPr marL="0" indent="0">
+              <a:buNone/>
+            </a:pPr>
+            <a:endParaRPr lang="ru-RU" sz="2100" dirty="0">
+              <a:solidFill>
+                <a:schemeClr val="accent1"/>
+              </a:solidFill>
+              <a:latin typeface="+mj-lt"/>
+              <a:ea typeface="+mj-ea"/>
+              <a:cs typeface="+mj-cs"/>
+            </a:endParaRPr>
+          </a:p>
+          <a:p>
+            <a:pPr marL="0" indent="0">
+              <a:buNone/>
+            </a:pPr>
+            <a:endParaRPr lang="ru-RU" sz="2100" dirty="0">
+              <a:solidFill>
+                <a:schemeClr val="accent1"/>
+              </a:solidFill>
+              <a:latin typeface="+mj-lt"/>
+              <a:ea typeface="+mj-ea"/>
+              <a:cs typeface="+mj-cs"/>
+            </a:endParaRPr>
+          </a:p>
+          <a:p>
+            <a:pPr marL="0" indent="0">
+              <a:buNone/>
+            </a:pPr>
+            <a:endParaRPr lang="ru-RU" sz="2100" dirty="0">
+              <a:solidFill>
+                <a:schemeClr val="accent1"/>
+              </a:solidFill>
+              <a:latin typeface="+mj-lt"/>
+              <a:ea typeface="+mj-ea"/>
+              <a:cs typeface="+mj-cs"/>
+            </a:endParaRPr>
+          </a:p>
+          <a:p>
+            <a:pPr marL="0" indent="0">
+              <a:buNone/>
+            </a:pPr>
+            <a:endParaRPr lang="ru-RU" sz="2100" dirty="0">
+              <a:solidFill>
+                <a:schemeClr val="accent1"/>
+              </a:solidFill>
+              <a:latin typeface="+mj-lt"/>
+              <a:ea typeface="+mj-ea"/>
+              <a:cs typeface="+mj-cs"/>
+            </a:endParaRPr>
+          </a:p>
+          <a:p>
+            <a:pPr marL="0" indent="0">
+              <a:buNone/>
+            </a:pPr>
+            <a:endParaRPr lang="ru-RU" sz="2100" dirty="0">
+              <a:solidFill>
+                <a:schemeClr val="accent1"/>
+              </a:solidFill>
+              <a:latin typeface="+mj-lt"/>
+              <a:ea typeface="+mj-ea"/>
+              <a:cs typeface="+mj-cs"/>
+            </a:endParaRPr>
+          </a:p>
+          <a:p>
+            <a:pPr marL="0" indent="0">
+              <a:buNone/>
+            </a:pPr>
+            <a:endParaRPr lang="ru-RU" sz="2100" dirty="0">
+              <a:solidFill>
+                <a:schemeClr val="accent1"/>
+              </a:solidFill>
+              <a:latin typeface="+mj-lt"/>
+              <a:ea typeface="+mj-ea"/>
+              <a:cs typeface="+mj-cs"/>
+            </a:endParaRPr>
+          </a:p>
+          <a:p>
+            <a:pPr marL="0" indent="0">
+              <a:buNone/>
+            </a:pPr>
+            <a:endParaRPr lang="ru-RU" sz="2100" dirty="0">
+              <a:solidFill>
+                <a:schemeClr val="accent1"/>
+              </a:solidFill>
+              <a:latin typeface="+mj-lt"/>
+              <a:ea typeface="+mj-ea"/>
+              <a:cs typeface="+mj-cs"/>
+            </a:endParaRPr>
+          </a:p>
+          <a:p>
+            <a:pPr marL="0" indent="0">
+              <a:buNone/>
+            </a:pPr>
+            <a:endParaRPr lang="ru-RU" sz="2100" dirty="0">
+              <a:solidFill>
+                <a:schemeClr val="accent1"/>
+              </a:solidFill>
+              <a:latin typeface="+mj-lt"/>
+              <a:ea typeface="+mj-ea"/>
+              <a:cs typeface="+mj-cs"/>
+            </a:endParaRPr>
+          </a:p>
+          <a:p>
+            <a:pPr marL="0" indent="0">
+              <a:buNone/>
+            </a:pPr>
+            <a:endParaRPr lang="ru-RU" sz="2100" dirty="0">
+              <a:solidFill>
+                <a:schemeClr val="accent1"/>
+              </a:solidFill>
+              <a:latin typeface="+mj-lt"/>
+              <a:ea typeface="+mj-ea"/>
+              <a:cs typeface="+mj-cs"/>
+            </a:endParaRPr>
+          </a:p>
+          <a:p>
+            <a:pPr marL="0" indent="0">
+              <a:buNone/>
+            </a:pPr>
+            <a:endParaRPr lang="ru-RU" sz="2100" dirty="0">
+              <a:solidFill>
+                <a:schemeClr val="accent1"/>
+              </a:solidFill>
+              <a:latin typeface="+mj-lt"/>
+              <a:ea typeface="+mj-ea"/>
+              <a:cs typeface="+mj-cs"/>
+            </a:endParaRPr>
+          </a:p>
+          <a:p>
+            <a:pPr marL="0" indent="0">
+              <a:buNone/>
+            </a:pPr>
+            <a:endParaRPr lang="ru-RU" sz="2100" dirty="0">
+              <a:solidFill>
+                <a:schemeClr val="accent1"/>
+              </a:solidFill>
+              <a:latin typeface="+mj-lt"/>
+              <a:ea typeface="+mj-ea"/>
+              <a:cs typeface="+mj-cs"/>
+            </a:endParaRPr>
+          </a:p>
+          <a:p>
+            <a:pPr marL="0" indent="0">
+              <a:buNone/>
+            </a:pPr>
+            <a:endParaRPr lang="ru-RU" sz="1400" dirty="0"/>
+          </a:p>
+          <a:p>
+            <a:pPr marL="0" indent="0">
+              <a:spcBef>
+                <a:spcPts val="0"/>
+              </a:spcBef>
+              <a:buNone/>
+            </a:pPr>
+            <a:endParaRPr lang="en-US" sz="1400" dirty="0">
+              <a:solidFill>
+                <a:schemeClr val="tx1"/>
+              </a:solidFill>
+            </a:endParaRPr>
+          </a:p>
+          <a:p>
+            <a:pPr marL="0" indent="0">
+              <a:spcBef>
+                <a:spcPts val="0"/>
+              </a:spcBef>
+              <a:buNone/>
+            </a:pPr>
+            <a:endParaRPr lang="ru-RU" sz="1400" dirty="0">
+              <a:solidFill>
+                <a:schemeClr val="tx1"/>
+              </a:solidFill>
+            </a:endParaRPr>
+          </a:p>
+          <a:p>
+            <a:pPr marL="0" indent="0">
+              <a:spcBef>
+                <a:spcPts val="0"/>
+              </a:spcBef>
+              <a:buNone/>
+            </a:pPr>
+            <a:r>
+              <a:rPr lang="ru-RU" sz="1400" dirty="0">
+                <a:solidFill>
+                  <a:schemeClr val="tx1"/>
+                </a:solidFill>
+              </a:rPr>
+              <a:t>По всем платформам, так и в разрезе платформ тенденция одинаковая.</a:t>
+            </a:r>
+          </a:p>
+        </p:txBody>
+      </p:sp>
+      <p:graphicFrame>
+        <p:nvGraphicFramePr>
+          <p:cNvPr id="2" name="Таблица 1">
+            <a:extLst>
+              <a:ext uri="{FF2B5EF4-FFF2-40B4-BE49-F238E27FC236}">
+                <a16:creationId xmlns:a16="http://schemas.microsoft.com/office/drawing/2014/main" id="{F89C932E-91C5-423C-89B2-DE23CB9030A4}"/>
+              </a:ext>
+            </a:extLst>
+          </p:cNvPr>
+          <p:cNvGraphicFramePr>
+            <a:graphicFrameLocks noGrp="1"/>
+          </p:cNvGraphicFramePr>
+          <p:nvPr>
+            <p:extLst>
+              <p:ext uri="{D42A27DB-BD31-4B8C-83A1-F6EECF244321}">
+                <p14:modId xmlns:p14="http://schemas.microsoft.com/office/powerpoint/2010/main" val="2116666754"/>
+              </p:ext>
+            </p:extLst>
+          </p:nvPr>
+        </p:nvGraphicFramePr>
+        <p:xfrm>
+          <a:off x="321734" y="800100"/>
+          <a:ext cx="9235447" cy="5270499"/>
+        </p:xfrm>
+        <a:graphic>
+          <a:graphicData uri="http://schemas.openxmlformats.org/drawingml/2006/table">
+            <a:tbl>
+              <a:tblPr firstRow="1" firstCol="1" bandRow="1">
+                <a:tableStyleId>{5C22544A-7EE6-4342-B048-85BDC9FD1C3A}</a:tableStyleId>
+              </a:tblPr>
+              <a:tblGrid>
+                <a:gridCol w="1498022">
+                  <a:extLst>
+                    <a:ext uri="{9D8B030D-6E8A-4147-A177-3AD203B41FA5}">
+                      <a16:colId xmlns:a16="http://schemas.microsoft.com/office/drawing/2014/main" val="652168365"/>
+                    </a:ext>
+                  </a:extLst>
+                </a:gridCol>
+                <a:gridCol w="1627862">
+                  <a:extLst>
+                    <a:ext uri="{9D8B030D-6E8A-4147-A177-3AD203B41FA5}">
+                      <a16:colId xmlns:a16="http://schemas.microsoft.com/office/drawing/2014/main" val="2373693564"/>
+                    </a:ext>
+                  </a:extLst>
+                </a:gridCol>
+                <a:gridCol w="1753286">
+                  <a:extLst>
+                    <a:ext uri="{9D8B030D-6E8A-4147-A177-3AD203B41FA5}">
+                      <a16:colId xmlns:a16="http://schemas.microsoft.com/office/drawing/2014/main" val="2872254615"/>
+                    </a:ext>
+                  </a:extLst>
+                </a:gridCol>
+                <a:gridCol w="1877828">
+                  <a:extLst>
+                    <a:ext uri="{9D8B030D-6E8A-4147-A177-3AD203B41FA5}">
+                      <a16:colId xmlns:a16="http://schemas.microsoft.com/office/drawing/2014/main" val="2253505319"/>
+                    </a:ext>
+                  </a:extLst>
+                </a:gridCol>
+                <a:gridCol w="2478449">
+                  <a:extLst>
+                    <a:ext uri="{9D8B030D-6E8A-4147-A177-3AD203B41FA5}">
+                      <a16:colId xmlns:a16="http://schemas.microsoft.com/office/drawing/2014/main" val="1050123184"/>
+                    </a:ext>
+                  </a:extLst>
+                </a:gridCol>
+              </a:tblGrid>
+              <a:tr h="903939">
+                <a:tc>
+                  <a:txBody>
+                    <a:bodyPr/>
+                    <a:lstStyle/>
+                    <a:p>
+                      <a:pPr algn="ctr">
+                        <a:lnSpc>
+                          <a:spcPct val="107000"/>
+                        </a:lnSpc>
+                        <a:spcAft>
+                          <a:spcPts val="0"/>
+                        </a:spcAft>
+                      </a:pPr>
+                      <a:r>
+                        <a:rPr lang="ru-RU" sz="1400" dirty="0">
+                          <a:effectLst/>
+                        </a:rPr>
+                        <a:t>Метрика</a:t>
+                      </a:r>
+                      <a:endParaRPr lang="ru-RU" sz="1400" dirty="0">
+                        <a:effectLst/>
+                        <a:latin typeface="Calibri" panose="020F0502020204030204" pitchFamily="34" charset="0"/>
+                        <a:ea typeface="Calibri" panose="020F0502020204030204" pitchFamily="34" charset="0"/>
+                        <a:cs typeface="Times New Roman" panose="02020603050405020304" pitchFamily="18" charset="0"/>
+                      </a:endParaRPr>
+                    </a:p>
+                  </a:txBody>
+                  <a:tcPr marL="68580" marR="68580" marT="0" marB="0"/>
+                </a:tc>
+                <a:tc>
+                  <a:txBody>
+                    <a:bodyPr/>
+                    <a:lstStyle/>
+                    <a:p>
+                      <a:pPr algn="ctr">
+                        <a:lnSpc>
+                          <a:spcPct val="107000"/>
+                        </a:lnSpc>
+                        <a:spcAft>
+                          <a:spcPts val="0"/>
+                        </a:spcAft>
+                      </a:pPr>
+                      <a:r>
+                        <a:rPr lang="ru-RU" sz="1400" dirty="0">
+                          <a:effectLst/>
+                        </a:rPr>
+                        <a:t>Значение контрольной  группы А</a:t>
+                      </a:r>
+                      <a:endParaRPr lang="ru-RU" sz="1400" dirty="0">
+                        <a:effectLst/>
+                        <a:latin typeface="Calibri" panose="020F0502020204030204" pitchFamily="34" charset="0"/>
+                        <a:ea typeface="Calibri" panose="020F0502020204030204" pitchFamily="34" charset="0"/>
+                        <a:cs typeface="Times New Roman" panose="02020603050405020304" pitchFamily="18" charset="0"/>
+                      </a:endParaRPr>
+                    </a:p>
+                  </a:txBody>
+                  <a:tcPr marL="68580" marR="68580" marT="0" marB="0"/>
+                </a:tc>
+                <a:tc>
+                  <a:txBody>
+                    <a:bodyPr/>
+                    <a:lstStyle/>
+                    <a:p>
+                      <a:pPr algn="ctr">
+                        <a:lnSpc>
+                          <a:spcPct val="107000"/>
+                        </a:lnSpc>
+                        <a:spcAft>
+                          <a:spcPts val="0"/>
+                        </a:spcAft>
+                      </a:pPr>
+                      <a:r>
+                        <a:rPr lang="ru-RU" sz="1400" dirty="0">
+                          <a:effectLst/>
+                        </a:rPr>
+                        <a:t>Значение тестовой группы В</a:t>
+                      </a:r>
+                      <a:endParaRPr lang="ru-RU" sz="1400" dirty="0">
+                        <a:effectLst/>
+                        <a:latin typeface="Calibri" panose="020F0502020204030204" pitchFamily="34" charset="0"/>
+                        <a:ea typeface="Calibri" panose="020F0502020204030204" pitchFamily="34" charset="0"/>
+                        <a:cs typeface="Times New Roman" panose="02020603050405020304" pitchFamily="18" charset="0"/>
+                      </a:endParaRPr>
+                    </a:p>
+                  </a:txBody>
+                  <a:tcPr marL="68580" marR="68580" marT="0" marB="0"/>
+                </a:tc>
+                <a:tc>
+                  <a:txBody>
+                    <a:bodyPr/>
+                    <a:lstStyle/>
+                    <a:p>
+                      <a:pPr algn="ctr">
+                        <a:lnSpc>
+                          <a:spcPct val="107000"/>
+                        </a:lnSpc>
+                        <a:spcAft>
+                          <a:spcPts val="0"/>
+                        </a:spcAft>
+                      </a:pPr>
+                      <a:r>
+                        <a:rPr lang="ru-RU" sz="1400" dirty="0">
+                          <a:effectLst/>
+                        </a:rPr>
+                        <a:t>Относительная разница B от A</a:t>
+                      </a:r>
+                      <a:endParaRPr lang="ru-RU" sz="1400" dirty="0">
+                        <a:effectLst/>
+                        <a:latin typeface="Calibri" panose="020F0502020204030204" pitchFamily="34" charset="0"/>
+                        <a:ea typeface="Calibri" panose="020F0502020204030204" pitchFamily="34" charset="0"/>
+                        <a:cs typeface="Times New Roman" panose="02020603050405020304" pitchFamily="18" charset="0"/>
+                      </a:endParaRPr>
+                    </a:p>
+                  </a:txBody>
+                  <a:tcPr marL="68580" marR="68580" marT="0" marB="0"/>
+                </a:tc>
+                <a:tc>
+                  <a:txBody>
+                    <a:bodyPr/>
+                    <a:lstStyle/>
+                    <a:p>
+                      <a:pPr algn="ctr">
+                        <a:lnSpc>
+                          <a:spcPct val="107000"/>
+                        </a:lnSpc>
+                        <a:spcAft>
+                          <a:spcPts val="0"/>
+                        </a:spcAft>
+                      </a:pPr>
+                      <a:r>
+                        <a:rPr lang="ru-RU" sz="1400" dirty="0">
+                          <a:effectLst/>
+                        </a:rPr>
+                        <a:t>Уровень значимости различий </a:t>
+                      </a:r>
+                      <a:r>
+                        <a:rPr lang="en-US" sz="1400" dirty="0">
+                          <a:effectLst/>
+                        </a:rPr>
+                        <a:t>p</a:t>
+                      </a:r>
+                      <a:r>
+                        <a:rPr lang="ru-RU" sz="1400" dirty="0">
+                          <a:effectLst/>
+                        </a:rPr>
+                        <a:t>_</a:t>
+                      </a:r>
+                      <a:r>
+                        <a:rPr lang="en-US" sz="1400" dirty="0">
+                          <a:effectLst/>
+                        </a:rPr>
+                        <a:t>value</a:t>
+                      </a:r>
+                      <a:endParaRPr lang="ru-RU" sz="1400" dirty="0">
+                        <a:effectLst/>
+                        <a:latin typeface="Calibri" panose="020F0502020204030204" pitchFamily="34" charset="0"/>
+                        <a:ea typeface="Calibri" panose="020F0502020204030204" pitchFamily="34" charset="0"/>
+                        <a:cs typeface="Times New Roman" panose="02020603050405020304" pitchFamily="18" charset="0"/>
+                      </a:endParaRPr>
+                    </a:p>
+                  </a:txBody>
+                  <a:tcPr marL="68580" marR="68580" marT="0" marB="0"/>
+                </a:tc>
+                <a:extLst>
+                  <a:ext uri="{0D108BD9-81ED-4DB2-BD59-A6C34878D82A}">
+                    <a16:rowId xmlns:a16="http://schemas.microsoft.com/office/drawing/2014/main" val="1946513323"/>
+                  </a:ext>
+                </a:extLst>
+              </a:tr>
+              <a:tr h="291104">
+                <a:tc gridSpan="5">
+                  <a:txBody>
+                    <a:bodyPr/>
+                    <a:lstStyle/>
+                    <a:p>
+                      <a:pPr algn="ctr">
+                        <a:lnSpc>
+                          <a:spcPct val="107000"/>
+                        </a:lnSpc>
+                        <a:spcAft>
+                          <a:spcPts val="0"/>
+                        </a:spcAft>
+                      </a:pPr>
+                      <a:r>
+                        <a:rPr lang="ru-RU" sz="1400" dirty="0">
+                          <a:effectLst/>
+                        </a:rPr>
+                        <a:t>Все платформы</a:t>
+                      </a:r>
+                      <a:endParaRPr lang="ru-RU" sz="1400" dirty="0">
+                        <a:effectLst/>
+                        <a:latin typeface="Calibri" panose="020F0502020204030204" pitchFamily="34" charset="0"/>
+                        <a:ea typeface="Calibri" panose="020F0502020204030204" pitchFamily="34" charset="0"/>
+                        <a:cs typeface="Times New Roman" panose="02020603050405020304" pitchFamily="18" charset="0"/>
+                      </a:endParaRPr>
+                    </a:p>
+                  </a:txBody>
+                  <a:tcPr marL="68580" marR="68580" marT="0" marB="0"/>
+                </a:tc>
+                <a:tc hMerge="1">
+                  <a:txBody>
+                    <a:bodyPr/>
+                    <a:lstStyle/>
+                    <a:p>
+                      <a:endParaRPr lang="ru-RU"/>
+                    </a:p>
+                  </a:txBody>
+                  <a:tcPr/>
+                </a:tc>
+                <a:tc hMerge="1">
+                  <a:txBody>
+                    <a:bodyPr/>
+                    <a:lstStyle/>
+                    <a:p>
+                      <a:endParaRPr lang="ru-RU"/>
+                    </a:p>
+                  </a:txBody>
+                  <a:tcPr/>
+                </a:tc>
+                <a:tc hMerge="1">
+                  <a:txBody>
+                    <a:bodyPr/>
+                    <a:lstStyle/>
+                    <a:p>
+                      <a:endParaRPr lang="ru-RU"/>
+                    </a:p>
+                  </a:txBody>
+                  <a:tcPr/>
+                </a:tc>
+                <a:tc hMerge="1">
+                  <a:txBody>
+                    <a:bodyPr/>
+                    <a:lstStyle/>
+                    <a:p>
+                      <a:endParaRPr lang="ru-RU"/>
+                    </a:p>
+                  </a:txBody>
+                  <a:tcPr/>
+                </a:tc>
+                <a:extLst>
+                  <a:ext uri="{0D108BD9-81ED-4DB2-BD59-A6C34878D82A}">
+                    <a16:rowId xmlns:a16="http://schemas.microsoft.com/office/drawing/2014/main" val="1312556397"/>
+                  </a:ext>
+                </a:extLst>
+              </a:tr>
+              <a:tr h="291104">
+                <a:tc>
+                  <a:txBody>
+                    <a:bodyPr/>
+                    <a:lstStyle/>
+                    <a:p>
+                      <a:pPr>
+                        <a:lnSpc>
+                          <a:spcPct val="107000"/>
+                        </a:lnSpc>
+                        <a:spcAft>
+                          <a:spcPts val="0"/>
+                        </a:spcAft>
+                      </a:pPr>
+                      <a:r>
+                        <a:rPr lang="ru-RU" sz="1400" dirty="0">
+                          <a:effectLst/>
+                        </a:rPr>
+                        <a:t>RPM</a:t>
+                      </a:r>
+                      <a:endParaRPr lang="ru-RU" sz="1400" dirty="0">
+                        <a:effectLst/>
+                        <a:latin typeface="Calibri" panose="020F0502020204030204" pitchFamily="34" charset="0"/>
+                        <a:ea typeface="Calibri" panose="020F0502020204030204" pitchFamily="34" charset="0"/>
+                        <a:cs typeface="Times New Roman" panose="02020603050405020304" pitchFamily="18" charset="0"/>
+                      </a:endParaRPr>
+                    </a:p>
+                  </a:txBody>
+                  <a:tcPr marL="68580" marR="68580" marT="0" marB="0"/>
+                </a:tc>
+                <a:tc>
+                  <a:txBody>
+                    <a:bodyPr/>
+                    <a:lstStyle/>
+                    <a:p>
+                      <a:pPr algn="ctr">
+                        <a:lnSpc>
+                          <a:spcPct val="107000"/>
+                        </a:lnSpc>
+                        <a:spcAft>
+                          <a:spcPts val="0"/>
+                        </a:spcAft>
+                      </a:pPr>
+                      <a:r>
+                        <a:rPr lang="ru-RU" sz="1400" dirty="0">
+                          <a:effectLst/>
+                        </a:rPr>
+                        <a:t>2.4971</a:t>
+                      </a:r>
+                      <a:endParaRPr lang="ru-RU" sz="1400" dirty="0">
+                        <a:effectLst/>
+                        <a:latin typeface="Calibri" panose="020F0502020204030204" pitchFamily="34" charset="0"/>
+                        <a:ea typeface="Calibri" panose="020F0502020204030204" pitchFamily="34" charset="0"/>
+                        <a:cs typeface="Times New Roman" panose="02020603050405020304" pitchFamily="18" charset="0"/>
+                      </a:endParaRPr>
+                    </a:p>
+                  </a:txBody>
+                  <a:tcPr marL="68580" marR="68580" marT="0" marB="0"/>
+                </a:tc>
+                <a:tc>
+                  <a:txBody>
+                    <a:bodyPr/>
+                    <a:lstStyle/>
+                    <a:p>
+                      <a:pPr algn="ctr">
+                        <a:lnSpc>
+                          <a:spcPct val="107000"/>
+                        </a:lnSpc>
+                        <a:spcAft>
+                          <a:spcPts val="0"/>
+                        </a:spcAft>
+                      </a:pPr>
+                      <a:r>
+                        <a:rPr lang="ru-RU" sz="1400" dirty="0">
+                          <a:effectLst/>
+                        </a:rPr>
+                        <a:t>2.9851</a:t>
+                      </a:r>
+                      <a:endParaRPr lang="ru-RU" sz="1400" dirty="0">
+                        <a:effectLst/>
+                        <a:latin typeface="Calibri" panose="020F0502020204030204" pitchFamily="34" charset="0"/>
+                        <a:ea typeface="Calibri" panose="020F0502020204030204" pitchFamily="34" charset="0"/>
+                        <a:cs typeface="Times New Roman" panose="02020603050405020304" pitchFamily="18" charset="0"/>
+                      </a:endParaRPr>
+                    </a:p>
+                  </a:txBody>
+                  <a:tcPr marL="68580" marR="68580" marT="0" marB="0"/>
+                </a:tc>
+                <a:tc>
+                  <a:txBody>
+                    <a:bodyPr/>
+                    <a:lstStyle/>
+                    <a:p>
+                      <a:pPr algn="ctr">
+                        <a:lnSpc>
+                          <a:spcPct val="107000"/>
+                        </a:lnSpc>
+                        <a:spcAft>
+                          <a:spcPts val="0"/>
+                        </a:spcAft>
+                      </a:pPr>
+                      <a:r>
+                        <a:rPr lang="ru-RU" sz="1400">
+                          <a:effectLst/>
+                        </a:rPr>
+                        <a:t>19.54 %</a:t>
+                      </a:r>
+                      <a:r>
+                        <a:rPr lang="en-US" sz="1400">
+                          <a:effectLst/>
+                        </a:rPr>
+                        <a:t> ↑</a:t>
+                      </a:r>
+                      <a:endParaRPr lang="ru-RU" sz="1400">
+                        <a:effectLst/>
+                        <a:latin typeface="Calibri" panose="020F0502020204030204" pitchFamily="34" charset="0"/>
+                        <a:ea typeface="Calibri" panose="020F0502020204030204" pitchFamily="34" charset="0"/>
+                        <a:cs typeface="Times New Roman" panose="02020603050405020304" pitchFamily="18" charset="0"/>
+                      </a:endParaRPr>
+                    </a:p>
+                  </a:txBody>
+                  <a:tcPr marL="68580" marR="68580" marT="0" marB="0"/>
+                </a:tc>
+                <a:tc>
+                  <a:txBody>
+                    <a:bodyPr/>
+                    <a:lstStyle/>
+                    <a:p>
+                      <a:pPr>
+                        <a:lnSpc>
+                          <a:spcPct val="107000"/>
+                        </a:lnSpc>
+                        <a:spcAft>
+                          <a:spcPts val="0"/>
+                        </a:spcAft>
+                      </a:pPr>
+                      <a:r>
+                        <a:rPr lang="ru-RU" sz="1400">
+                          <a:effectLst/>
+                        </a:rPr>
+                        <a:t>0,3604</a:t>
+                      </a:r>
+                      <a:r>
+                        <a:rPr lang="en-US" sz="1400">
+                          <a:effectLst/>
+                        </a:rPr>
+                        <a:t> – </a:t>
+                      </a:r>
+                      <a:r>
+                        <a:rPr lang="ru-RU" sz="1400">
+                          <a:effectLst/>
+                        </a:rPr>
+                        <a:t>не значимо</a:t>
+                      </a:r>
+                      <a:endParaRPr lang="ru-RU" sz="1400">
+                        <a:effectLst/>
+                        <a:latin typeface="Calibri" panose="020F0502020204030204" pitchFamily="34" charset="0"/>
+                        <a:ea typeface="Calibri" panose="020F0502020204030204" pitchFamily="34" charset="0"/>
+                        <a:cs typeface="Times New Roman" panose="02020603050405020304" pitchFamily="18" charset="0"/>
+                      </a:endParaRPr>
+                    </a:p>
+                  </a:txBody>
+                  <a:tcPr marL="68580" marR="68580" marT="0" marB="0"/>
+                </a:tc>
+                <a:extLst>
+                  <a:ext uri="{0D108BD9-81ED-4DB2-BD59-A6C34878D82A}">
+                    <a16:rowId xmlns:a16="http://schemas.microsoft.com/office/drawing/2014/main" val="1949553728"/>
+                  </a:ext>
+                </a:extLst>
+              </a:tr>
+              <a:tr h="291104">
+                <a:tc>
+                  <a:txBody>
+                    <a:bodyPr/>
+                    <a:lstStyle/>
+                    <a:p>
+                      <a:pPr>
+                        <a:lnSpc>
+                          <a:spcPct val="107000"/>
+                        </a:lnSpc>
+                        <a:spcAft>
+                          <a:spcPts val="0"/>
+                        </a:spcAft>
+                      </a:pPr>
+                      <a:r>
+                        <a:rPr lang="ru-RU" sz="1400">
+                          <a:effectLst/>
+                        </a:rPr>
+                        <a:t>RPS</a:t>
+                      </a:r>
+                      <a:endParaRPr lang="ru-RU" sz="1400">
+                        <a:effectLst/>
+                        <a:latin typeface="Calibri" panose="020F0502020204030204" pitchFamily="34" charset="0"/>
+                        <a:ea typeface="Calibri" panose="020F0502020204030204" pitchFamily="34" charset="0"/>
+                        <a:cs typeface="Times New Roman" panose="02020603050405020304" pitchFamily="18" charset="0"/>
+                      </a:endParaRPr>
+                    </a:p>
+                  </a:txBody>
+                  <a:tcPr marL="68580" marR="68580" marT="0" marB="0"/>
+                </a:tc>
+                <a:tc>
+                  <a:txBody>
+                    <a:bodyPr/>
+                    <a:lstStyle/>
+                    <a:p>
+                      <a:pPr algn="ctr">
+                        <a:lnSpc>
+                          <a:spcPct val="107000"/>
+                        </a:lnSpc>
+                        <a:spcAft>
+                          <a:spcPts val="0"/>
+                        </a:spcAft>
+                      </a:pPr>
+                      <a:r>
+                        <a:rPr lang="ru-RU" sz="1400">
+                          <a:effectLst/>
+                        </a:rPr>
+                        <a:t>0.0049</a:t>
+                      </a:r>
+                      <a:endParaRPr lang="ru-RU" sz="1400">
+                        <a:effectLst/>
+                        <a:latin typeface="Calibri" panose="020F0502020204030204" pitchFamily="34" charset="0"/>
+                        <a:ea typeface="Calibri" panose="020F0502020204030204" pitchFamily="34" charset="0"/>
+                        <a:cs typeface="Times New Roman" panose="02020603050405020304" pitchFamily="18" charset="0"/>
+                      </a:endParaRPr>
+                    </a:p>
+                  </a:txBody>
+                  <a:tcPr marL="68580" marR="68580" marT="0" marB="0"/>
+                </a:tc>
+                <a:tc>
+                  <a:txBody>
+                    <a:bodyPr/>
+                    <a:lstStyle/>
+                    <a:p>
+                      <a:pPr algn="ctr">
+                        <a:lnSpc>
+                          <a:spcPct val="107000"/>
+                        </a:lnSpc>
+                        <a:spcAft>
+                          <a:spcPts val="0"/>
+                        </a:spcAft>
+                      </a:pPr>
+                      <a:r>
+                        <a:rPr lang="ru-RU" sz="1400" dirty="0">
+                          <a:effectLst/>
+                        </a:rPr>
+                        <a:t>0.0055</a:t>
+                      </a:r>
+                      <a:endParaRPr lang="ru-RU" sz="1400" dirty="0">
+                        <a:effectLst/>
+                        <a:latin typeface="Calibri" panose="020F0502020204030204" pitchFamily="34" charset="0"/>
+                        <a:ea typeface="Calibri" panose="020F0502020204030204" pitchFamily="34" charset="0"/>
+                        <a:cs typeface="Times New Roman" panose="02020603050405020304" pitchFamily="18" charset="0"/>
+                      </a:endParaRPr>
+                    </a:p>
+                  </a:txBody>
+                  <a:tcPr marL="68580" marR="68580" marT="0" marB="0"/>
+                </a:tc>
+                <a:tc>
+                  <a:txBody>
+                    <a:bodyPr/>
+                    <a:lstStyle/>
+                    <a:p>
+                      <a:pPr algn="ctr">
+                        <a:lnSpc>
+                          <a:spcPct val="107000"/>
+                        </a:lnSpc>
+                        <a:spcAft>
+                          <a:spcPts val="0"/>
+                        </a:spcAft>
+                      </a:pPr>
+                      <a:r>
+                        <a:rPr lang="ru-RU" sz="1400" dirty="0">
+                          <a:effectLst/>
+                        </a:rPr>
+                        <a:t>12.22 %</a:t>
+                      </a:r>
+                      <a:r>
+                        <a:rPr lang="en-US" sz="1400" dirty="0">
+                          <a:effectLst/>
+                        </a:rPr>
+                        <a:t> ↑</a:t>
+                      </a:r>
+                      <a:endParaRPr lang="ru-RU" sz="1400" dirty="0">
+                        <a:effectLst/>
+                        <a:latin typeface="Calibri" panose="020F0502020204030204" pitchFamily="34" charset="0"/>
+                        <a:ea typeface="Calibri" panose="020F0502020204030204" pitchFamily="34" charset="0"/>
+                        <a:cs typeface="Times New Roman" panose="02020603050405020304" pitchFamily="18" charset="0"/>
+                      </a:endParaRPr>
+                    </a:p>
+                  </a:txBody>
+                  <a:tcPr marL="68580" marR="68580" marT="0" marB="0"/>
+                </a:tc>
+                <a:tc>
+                  <a:txBody>
+                    <a:bodyPr/>
+                    <a:lstStyle/>
+                    <a:p>
+                      <a:pPr>
+                        <a:lnSpc>
+                          <a:spcPct val="107000"/>
+                        </a:lnSpc>
+                        <a:spcAft>
+                          <a:spcPts val="0"/>
+                        </a:spcAft>
+                      </a:pPr>
+                      <a:r>
+                        <a:rPr lang="ru-RU" sz="1400">
+                          <a:effectLst/>
+                        </a:rPr>
+                        <a:t>0,5193 </a:t>
+                      </a:r>
+                      <a:r>
+                        <a:rPr lang="en-US" sz="1400">
+                          <a:effectLst/>
+                        </a:rPr>
+                        <a:t>– </a:t>
+                      </a:r>
+                      <a:r>
+                        <a:rPr lang="ru-RU" sz="1400">
+                          <a:effectLst/>
+                        </a:rPr>
+                        <a:t>не значимо</a:t>
+                      </a:r>
+                      <a:endParaRPr lang="ru-RU" sz="1400">
+                        <a:effectLst/>
+                        <a:latin typeface="Calibri" panose="020F0502020204030204" pitchFamily="34" charset="0"/>
+                        <a:ea typeface="Calibri" panose="020F0502020204030204" pitchFamily="34" charset="0"/>
+                        <a:cs typeface="Times New Roman" panose="02020603050405020304" pitchFamily="18" charset="0"/>
+                      </a:endParaRPr>
+                    </a:p>
+                  </a:txBody>
+                  <a:tcPr marL="68580" marR="68580" marT="0" marB="0"/>
+                </a:tc>
+                <a:extLst>
+                  <a:ext uri="{0D108BD9-81ED-4DB2-BD59-A6C34878D82A}">
+                    <a16:rowId xmlns:a16="http://schemas.microsoft.com/office/drawing/2014/main" val="1779302270"/>
+                  </a:ext>
+                </a:extLst>
+              </a:tr>
+              <a:tr h="291104">
+                <a:tc>
+                  <a:txBody>
+                    <a:bodyPr/>
+                    <a:lstStyle/>
+                    <a:p>
+                      <a:pPr>
+                        <a:lnSpc>
+                          <a:spcPct val="107000"/>
+                        </a:lnSpc>
+                        <a:spcAft>
+                          <a:spcPts val="0"/>
+                        </a:spcAft>
+                      </a:pPr>
+                      <a:r>
+                        <a:rPr lang="ru-RU" sz="1400">
+                          <a:effectLst/>
+                        </a:rPr>
+                        <a:t>Paid CTR</a:t>
+                      </a:r>
+                      <a:endParaRPr lang="ru-RU" sz="1400">
+                        <a:effectLst/>
+                        <a:latin typeface="Calibri" panose="020F0502020204030204" pitchFamily="34" charset="0"/>
+                        <a:ea typeface="Calibri" panose="020F0502020204030204" pitchFamily="34" charset="0"/>
+                        <a:cs typeface="Times New Roman" panose="02020603050405020304" pitchFamily="18" charset="0"/>
+                      </a:endParaRPr>
+                    </a:p>
+                  </a:txBody>
+                  <a:tcPr marL="68580" marR="68580" marT="0" marB="0"/>
+                </a:tc>
+                <a:tc>
+                  <a:txBody>
+                    <a:bodyPr/>
+                    <a:lstStyle/>
+                    <a:p>
+                      <a:pPr algn="ctr">
+                        <a:lnSpc>
+                          <a:spcPct val="107000"/>
+                        </a:lnSpc>
+                        <a:spcAft>
+                          <a:spcPts val="0"/>
+                        </a:spcAft>
+                      </a:pPr>
+                      <a:r>
+                        <a:rPr lang="ru-RU" sz="1400">
+                          <a:effectLst/>
+                        </a:rPr>
+                        <a:t>0.021</a:t>
+                      </a:r>
+                      <a:endParaRPr lang="ru-RU" sz="1400">
+                        <a:effectLst/>
+                        <a:latin typeface="Calibri" panose="020F0502020204030204" pitchFamily="34" charset="0"/>
+                        <a:ea typeface="Calibri" panose="020F0502020204030204" pitchFamily="34" charset="0"/>
+                        <a:cs typeface="Times New Roman" panose="02020603050405020304" pitchFamily="18" charset="0"/>
+                      </a:endParaRPr>
+                    </a:p>
+                  </a:txBody>
+                  <a:tcPr marL="68580" marR="68580" marT="0" marB="0"/>
+                </a:tc>
+                <a:tc>
+                  <a:txBody>
+                    <a:bodyPr/>
+                    <a:lstStyle/>
+                    <a:p>
+                      <a:pPr algn="ctr">
+                        <a:lnSpc>
+                          <a:spcPct val="107000"/>
+                        </a:lnSpc>
+                        <a:spcAft>
+                          <a:spcPts val="0"/>
+                        </a:spcAft>
+                      </a:pPr>
+                      <a:r>
+                        <a:rPr lang="ru-RU" sz="1400">
+                          <a:effectLst/>
+                        </a:rPr>
+                        <a:t>0.0239</a:t>
+                      </a:r>
+                      <a:endParaRPr lang="ru-RU" sz="1400">
+                        <a:effectLst/>
+                        <a:latin typeface="Calibri" panose="020F0502020204030204" pitchFamily="34" charset="0"/>
+                        <a:ea typeface="Calibri" panose="020F0502020204030204" pitchFamily="34" charset="0"/>
+                        <a:cs typeface="Times New Roman" panose="02020603050405020304" pitchFamily="18" charset="0"/>
+                      </a:endParaRPr>
+                    </a:p>
+                  </a:txBody>
+                  <a:tcPr marL="68580" marR="68580" marT="0" marB="0"/>
+                </a:tc>
+                <a:tc>
+                  <a:txBody>
+                    <a:bodyPr/>
+                    <a:lstStyle/>
+                    <a:p>
+                      <a:pPr algn="ctr">
+                        <a:lnSpc>
+                          <a:spcPct val="107000"/>
+                        </a:lnSpc>
+                        <a:spcAft>
+                          <a:spcPts val="0"/>
+                        </a:spcAft>
+                      </a:pPr>
+                      <a:r>
+                        <a:rPr lang="ru-RU" sz="1400" dirty="0">
+                          <a:effectLst/>
+                        </a:rPr>
+                        <a:t>13.78 %</a:t>
+                      </a:r>
+                      <a:r>
+                        <a:rPr lang="en-US" sz="1400" dirty="0">
+                          <a:effectLst/>
+                        </a:rPr>
+                        <a:t> ↑</a:t>
+                      </a:r>
+                      <a:endParaRPr lang="ru-RU" sz="1400" dirty="0">
+                        <a:effectLst/>
+                        <a:latin typeface="Calibri" panose="020F0502020204030204" pitchFamily="34" charset="0"/>
+                        <a:ea typeface="Calibri" panose="020F0502020204030204" pitchFamily="34" charset="0"/>
+                        <a:cs typeface="Times New Roman" panose="02020603050405020304" pitchFamily="18" charset="0"/>
+                      </a:endParaRPr>
+                    </a:p>
+                  </a:txBody>
+                  <a:tcPr marL="68580" marR="68580" marT="0" marB="0"/>
+                </a:tc>
+                <a:tc>
+                  <a:txBody>
+                    <a:bodyPr/>
+                    <a:lstStyle/>
+                    <a:p>
+                      <a:pPr>
+                        <a:lnSpc>
+                          <a:spcPct val="107000"/>
+                        </a:lnSpc>
+                        <a:spcAft>
+                          <a:spcPts val="0"/>
+                        </a:spcAft>
+                      </a:pPr>
+                      <a:r>
+                        <a:rPr lang="ru-RU" sz="1400">
+                          <a:effectLst/>
+                        </a:rPr>
+                        <a:t>0,2298 </a:t>
+                      </a:r>
+                      <a:r>
+                        <a:rPr lang="en-US" sz="1400">
+                          <a:effectLst/>
+                        </a:rPr>
+                        <a:t>– </a:t>
+                      </a:r>
+                      <a:r>
+                        <a:rPr lang="ru-RU" sz="1400">
+                          <a:effectLst/>
+                        </a:rPr>
+                        <a:t>не значимо</a:t>
+                      </a:r>
+                      <a:endParaRPr lang="ru-RU" sz="1400">
+                        <a:effectLst/>
+                        <a:latin typeface="Calibri" panose="020F0502020204030204" pitchFamily="34" charset="0"/>
+                        <a:ea typeface="Calibri" panose="020F0502020204030204" pitchFamily="34" charset="0"/>
+                        <a:cs typeface="Times New Roman" panose="02020603050405020304" pitchFamily="18" charset="0"/>
+                      </a:endParaRPr>
+                    </a:p>
+                  </a:txBody>
+                  <a:tcPr marL="68580" marR="68580" marT="0" marB="0"/>
+                </a:tc>
+                <a:extLst>
+                  <a:ext uri="{0D108BD9-81ED-4DB2-BD59-A6C34878D82A}">
+                    <a16:rowId xmlns:a16="http://schemas.microsoft.com/office/drawing/2014/main" val="1123875480"/>
+                  </a:ext>
+                </a:extLst>
+              </a:tr>
+              <a:tr h="291104">
+                <a:tc>
+                  <a:txBody>
+                    <a:bodyPr/>
+                    <a:lstStyle/>
+                    <a:p>
+                      <a:pPr>
+                        <a:lnSpc>
+                          <a:spcPct val="107000"/>
+                        </a:lnSpc>
+                        <a:spcAft>
+                          <a:spcPts val="0"/>
+                        </a:spcAft>
+                      </a:pPr>
+                      <a:r>
+                        <a:rPr lang="ru-RU" sz="1400">
+                          <a:effectLst/>
+                        </a:rPr>
+                        <a:t>Organic CTR</a:t>
+                      </a:r>
+                      <a:endParaRPr lang="ru-RU" sz="1400">
+                        <a:effectLst/>
+                        <a:latin typeface="Calibri" panose="020F0502020204030204" pitchFamily="34" charset="0"/>
+                        <a:ea typeface="Calibri" panose="020F0502020204030204" pitchFamily="34" charset="0"/>
+                        <a:cs typeface="Times New Roman" panose="02020603050405020304" pitchFamily="18" charset="0"/>
+                      </a:endParaRPr>
+                    </a:p>
+                  </a:txBody>
+                  <a:tcPr marL="68580" marR="68580" marT="0" marB="0"/>
+                </a:tc>
+                <a:tc>
+                  <a:txBody>
+                    <a:bodyPr/>
+                    <a:lstStyle/>
+                    <a:p>
+                      <a:pPr algn="ctr">
+                        <a:lnSpc>
+                          <a:spcPct val="107000"/>
+                        </a:lnSpc>
+                        <a:spcAft>
+                          <a:spcPts val="0"/>
+                        </a:spcAft>
+                      </a:pPr>
+                      <a:r>
+                        <a:rPr lang="ru-RU" sz="1400">
+                          <a:effectLst/>
+                        </a:rPr>
+                        <a:t>0.0674</a:t>
+                      </a:r>
+                      <a:endParaRPr lang="ru-RU" sz="1400">
+                        <a:effectLst/>
+                        <a:latin typeface="Calibri" panose="020F0502020204030204" pitchFamily="34" charset="0"/>
+                        <a:ea typeface="Calibri" panose="020F0502020204030204" pitchFamily="34" charset="0"/>
+                        <a:cs typeface="Times New Roman" panose="02020603050405020304" pitchFamily="18" charset="0"/>
+                      </a:endParaRPr>
+                    </a:p>
+                  </a:txBody>
+                  <a:tcPr marL="68580" marR="68580" marT="0" marB="0"/>
+                </a:tc>
+                <a:tc>
+                  <a:txBody>
+                    <a:bodyPr/>
+                    <a:lstStyle/>
+                    <a:p>
+                      <a:pPr algn="ctr">
+                        <a:lnSpc>
+                          <a:spcPct val="107000"/>
+                        </a:lnSpc>
+                        <a:spcAft>
+                          <a:spcPts val="0"/>
+                        </a:spcAft>
+                      </a:pPr>
+                      <a:r>
+                        <a:rPr lang="ru-RU" sz="1400">
+                          <a:effectLst/>
+                        </a:rPr>
+                        <a:t>0.0321</a:t>
+                      </a:r>
+                      <a:endParaRPr lang="ru-RU" sz="1400">
+                        <a:effectLst/>
+                        <a:latin typeface="Calibri" panose="020F0502020204030204" pitchFamily="34" charset="0"/>
+                        <a:ea typeface="Calibri" panose="020F0502020204030204" pitchFamily="34" charset="0"/>
+                        <a:cs typeface="Times New Roman" panose="02020603050405020304" pitchFamily="18" charset="0"/>
+                      </a:endParaRPr>
+                    </a:p>
+                  </a:txBody>
+                  <a:tcPr marL="68580" marR="68580" marT="0" marB="0"/>
+                </a:tc>
+                <a:tc>
+                  <a:txBody>
+                    <a:bodyPr/>
+                    <a:lstStyle/>
+                    <a:p>
+                      <a:pPr algn="ctr">
+                        <a:lnSpc>
+                          <a:spcPct val="107000"/>
+                        </a:lnSpc>
+                        <a:spcAft>
+                          <a:spcPts val="0"/>
+                        </a:spcAft>
+                      </a:pPr>
+                      <a:r>
+                        <a:rPr lang="ru-RU" sz="1400" dirty="0">
+                          <a:solidFill>
+                            <a:schemeClr val="accent5">
+                              <a:lumMod val="60000"/>
+                              <a:lumOff val="40000"/>
+                            </a:schemeClr>
+                          </a:solidFill>
+                          <a:effectLst/>
+                        </a:rPr>
+                        <a:t>-52.42% </a:t>
+                      </a:r>
+                      <a:r>
+                        <a:rPr lang="en-US" sz="1400" dirty="0">
+                          <a:solidFill>
+                            <a:schemeClr val="accent5">
+                              <a:lumMod val="60000"/>
+                              <a:lumOff val="40000"/>
+                            </a:schemeClr>
+                          </a:solidFill>
+                          <a:effectLst/>
+                        </a:rPr>
+                        <a:t>↓</a:t>
+                      </a:r>
+                      <a:endParaRPr lang="ru-RU" sz="1400" dirty="0">
+                        <a:solidFill>
+                          <a:schemeClr val="accent5">
+                            <a:lumMod val="60000"/>
+                            <a:lumOff val="40000"/>
+                          </a:schemeClr>
+                        </a:solidFill>
+                        <a:effectLst/>
+                        <a:latin typeface="Calibri" panose="020F0502020204030204" pitchFamily="34" charset="0"/>
+                        <a:ea typeface="Calibri" panose="020F0502020204030204" pitchFamily="34" charset="0"/>
+                        <a:cs typeface="Times New Roman" panose="02020603050405020304" pitchFamily="18" charset="0"/>
+                      </a:endParaRPr>
+                    </a:p>
+                  </a:txBody>
+                  <a:tcPr marL="68580" marR="68580" marT="0" marB="0"/>
+                </a:tc>
+                <a:tc>
+                  <a:txBody>
+                    <a:bodyPr/>
+                    <a:lstStyle/>
+                    <a:p>
+                      <a:pPr>
+                        <a:lnSpc>
+                          <a:spcPct val="107000"/>
+                        </a:lnSpc>
+                        <a:spcAft>
+                          <a:spcPts val="0"/>
+                        </a:spcAft>
+                      </a:pPr>
+                      <a:r>
+                        <a:rPr lang="en-US" sz="1400" dirty="0">
+                          <a:effectLst/>
+                        </a:rPr>
+                        <a:t>0</a:t>
+                      </a:r>
+                      <a:r>
+                        <a:rPr lang="ru-RU" sz="1400" dirty="0">
+                          <a:effectLst/>
+                        </a:rPr>
+                        <a:t> </a:t>
+                      </a:r>
+                      <a:r>
+                        <a:rPr lang="en-US" sz="1400" dirty="0">
+                          <a:effectLst/>
+                        </a:rPr>
+                        <a:t>– </a:t>
+                      </a:r>
+                      <a:r>
+                        <a:rPr lang="ru-RU" sz="1400" dirty="0">
+                          <a:solidFill>
+                            <a:schemeClr val="accent5">
+                              <a:lumMod val="60000"/>
+                              <a:lumOff val="40000"/>
+                            </a:schemeClr>
+                          </a:solidFill>
+                          <a:effectLst/>
+                        </a:rPr>
+                        <a:t>значимо</a:t>
+                      </a:r>
+                      <a:endParaRPr lang="ru-RU" sz="1400" dirty="0">
+                        <a:solidFill>
+                          <a:schemeClr val="accent5">
+                            <a:lumMod val="60000"/>
+                            <a:lumOff val="40000"/>
+                          </a:schemeClr>
+                        </a:solidFill>
+                        <a:effectLst/>
+                        <a:latin typeface="Calibri" panose="020F0502020204030204" pitchFamily="34" charset="0"/>
+                        <a:ea typeface="Calibri" panose="020F0502020204030204" pitchFamily="34" charset="0"/>
+                        <a:cs typeface="Times New Roman" panose="02020603050405020304" pitchFamily="18" charset="0"/>
+                      </a:endParaRPr>
+                    </a:p>
+                  </a:txBody>
+                  <a:tcPr marL="68580" marR="68580" marT="0" marB="0"/>
+                </a:tc>
+                <a:extLst>
+                  <a:ext uri="{0D108BD9-81ED-4DB2-BD59-A6C34878D82A}">
+                    <a16:rowId xmlns:a16="http://schemas.microsoft.com/office/drawing/2014/main" val="1137964395"/>
+                  </a:ext>
+                </a:extLst>
+              </a:tr>
+              <a:tr h="291104">
+                <a:tc gridSpan="5">
+                  <a:txBody>
+                    <a:bodyPr/>
+                    <a:lstStyle/>
+                    <a:p>
+                      <a:pPr algn="ctr">
+                        <a:lnSpc>
+                          <a:spcPct val="107000"/>
+                        </a:lnSpc>
+                        <a:spcAft>
+                          <a:spcPts val="0"/>
+                        </a:spcAft>
+                      </a:pPr>
+                      <a:r>
+                        <a:rPr lang="en-US" sz="1400" dirty="0">
+                          <a:effectLst/>
+                        </a:rPr>
+                        <a:t>Desktop</a:t>
+                      </a:r>
+                      <a:endParaRPr lang="ru-RU" sz="1400" dirty="0">
+                        <a:effectLst/>
+                        <a:latin typeface="Calibri" panose="020F0502020204030204" pitchFamily="34" charset="0"/>
+                        <a:ea typeface="Calibri" panose="020F0502020204030204" pitchFamily="34" charset="0"/>
+                        <a:cs typeface="Times New Roman" panose="02020603050405020304" pitchFamily="18" charset="0"/>
+                      </a:endParaRPr>
+                    </a:p>
+                  </a:txBody>
+                  <a:tcPr marL="68580" marR="68580" marT="0" marB="0"/>
+                </a:tc>
+                <a:tc hMerge="1">
+                  <a:txBody>
+                    <a:bodyPr/>
+                    <a:lstStyle/>
+                    <a:p>
+                      <a:endParaRPr lang="ru-RU"/>
+                    </a:p>
+                  </a:txBody>
+                  <a:tcPr/>
+                </a:tc>
+                <a:tc hMerge="1">
+                  <a:txBody>
+                    <a:bodyPr/>
+                    <a:lstStyle/>
+                    <a:p>
+                      <a:endParaRPr lang="ru-RU"/>
+                    </a:p>
+                  </a:txBody>
+                  <a:tcPr/>
+                </a:tc>
+                <a:tc hMerge="1">
+                  <a:txBody>
+                    <a:bodyPr/>
+                    <a:lstStyle/>
+                    <a:p>
+                      <a:endParaRPr lang="ru-RU"/>
+                    </a:p>
+                  </a:txBody>
+                  <a:tcPr/>
+                </a:tc>
+                <a:tc hMerge="1">
+                  <a:txBody>
+                    <a:bodyPr/>
+                    <a:lstStyle/>
+                    <a:p>
+                      <a:endParaRPr lang="ru-RU"/>
+                    </a:p>
+                  </a:txBody>
+                  <a:tcPr/>
+                </a:tc>
+                <a:extLst>
+                  <a:ext uri="{0D108BD9-81ED-4DB2-BD59-A6C34878D82A}">
+                    <a16:rowId xmlns:a16="http://schemas.microsoft.com/office/drawing/2014/main" val="1142996767"/>
+                  </a:ext>
+                </a:extLst>
+              </a:tr>
+              <a:tr h="291104">
+                <a:tc>
+                  <a:txBody>
+                    <a:bodyPr/>
+                    <a:lstStyle/>
+                    <a:p>
+                      <a:pPr>
+                        <a:lnSpc>
+                          <a:spcPct val="107000"/>
+                        </a:lnSpc>
+                        <a:spcAft>
+                          <a:spcPts val="0"/>
+                        </a:spcAft>
+                      </a:pPr>
+                      <a:r>
+                        <a:rPr lang="ru-RU" sz="1400">
+                          <a:effectLst/>
+                        </a:rPr>
+                        <a:t>RPM</a:t>
+                      </a:r>
+                      <a:endParaRPr lang="ru-RU" sz="1400">
+                        <a:effectLst/>
+                        <a:latin typeface="Calibri" panose="020F0502020204030204" pitchFamily="34" charset="0"/>
+                        <a:ea typeface="Calibri" panose="020F0502020204030204" pitchFamily="34" charset="0"/>
+                        <a:cs typeface="Times New Roman" panose="02020603050405020304" pitchFamily="18" charset="0"/>
+                      </a:endParaRPr>
+                    </a:p>
+                  </a:txBody>
+                  <a:tcPr marL="68580" marR="68580" marT="0" marB="0"/>
+                </a:tc>
+                <a:tc>
+                  <a:txBody>
+                    <a:bodyPr/>
+                    <a:lstStyle/>
+                    <a:p>
+                      <a:pPr algn="ctr">
+                        <a:lnSpc>
+                          <a:spcPct val="107000"/>
+                        </a:lnSpc>
+                        <a:spcAft>
+                          <a:spcPts val="0"/>
+                        </a:spcAft>
+                      </a:pPr>
+                      <a:r>
+                        <a:rPr lang="ru-RU" sz="1400" dirty="0">
+                          <a:effectLst/>
+                        </a:rPr>
+                        <a:t>2</a:t>
+                      </a:r>
+                      <a:r>
+                        <a:rPr lang="en-US" sz="1400" dirty="0">
+                          <a:effectLst/>
+                        </a:rPr>
+                        <a:t>.</a:t>
+                      </a:r>
+                      <a:r>
+                        <a:rPr lang="ru-RU" sz="1400" dirty="0">
+                          <a:effectLst/>
+                        </a:rPr>
+                        <a:t>0372</a:t>
+                      </a:r>
+                      <a:endParaRPr lang="ru-RU" sz="1400" dirty="0">
+                        <a:effectLst/>
+                        <a:latin typeface="Calibri" panose="020F0502020204030204" pitchFamily="34" charset="0"/>
+                        <a:ea typeface="Calibri" panose="020F0502020204030204" pitchFamily="34" charset="0"/>
+                        <a:cs typeface="Times New Roman" panose="02020603050405020304" pitchFamily="18" charset="0"/>
+                      </a:endParaRPr>
+                    </a:p>
+                  </a:txBody>
+                  <a:tcPr marL="68580" marR="68580" marT="0" marB="0"/>
+                </a:tc>
+                <a:tc>
+                  <a:txBody>
+                    <a:bodyPr/>
+                    <a:lstStyle/>
+                    <a:p>
+                      <a:pPr algn="ctr">
+                        <a:lnSpc>
+                          <a:spcPct val="107000"/>
+                        </a:lnSpc>
+                        <a:spcAft>
+                          <a:spcPts val="0"/>
+                        </a:spcAft>
+                      </a:pPr>
+                      <a:r>
+                        <a:rPr lang="en-US" sz="1400">
+                          <a:effectLst/>
+                        </a:rPr>
+                        <a:t>2.132</a:t>
+                      </a:r>
+                      <a:endParaRPr lang="ru-RU" sz="1400">
+                        <a:effectLst/>
+                        <a:latin typeface="Calibri" panose="020F0502020204030204" pitchFamily="34" charset="0"/>
+                        <a:ea typeface="Calibri" panose="020F0502020204030204" pitchFamily="34" charset="0"/>
+                        <a:cs typeface="Times New Roman" panose="02020603050405020304" pitchFamily="18" charset="0"/>
+                      </a:endParaRPr>
+                    </a:p>
+                  </a:txBody>
+                  <a:tcPr marL="68580" marR="68580" marT="0" marB="0"/>
+                </a:tc>
+                <a:tc>
+                  <a:txBody>
+                    <a:bodyPr/>
+                    <a:lstStyle/>
+                    <a:p>
+                      <a:pPr algn="ctr">
+                        <a:lnSpc>
+                          <a:spcPct val="107000"/>
+                        </a:lnSpc>
+                        <a:spcAft>
+                          <a:spcPts val="0"/>
+                        </a:spcAft>
+                      </a:pPr>
+                      <a:r>
+                        <a:rPr lang="en-US" sz="1400">
+                          <a:effectLst/>
+                        </a:rPr>
+                        <a:t>4.7 </a:t>
+                      </a:r>
+                      <a:r>
+                        <a:rPr lang="ru-RU" sz="1400">
+                          <a:effectLst/>
+                        </a:rPr>
+                        <a:t>%</a:t>
+                      </a:r>
+                      <a:r>
+                        <a:rPr lang="en-US" sz="1400">
+                          <a:effectLst/>
+                        </a:rPr>
+                        <a:t> ↑</a:t>
+                      </a:r>
+                      <a:endParaRPr lang="ru-RU" sz="1400">
+                        <a:effectLst/>
+                        <a:latin typeface="Calibri" panose="020F0502020204030204" pitchFamily="34" charset="0"/>
+                        <a:ea typeface="Calibri" panose="020F0502020204030204" pitchFamily="34" charset="0"/>
+                        <a:cs typeface="Times New Roman" panose="02020603050405020304" pitchFamily="18" charset="0"/>
+                      </a:endParaRPr>
+                    </a:p>
+                  </a:txBody>
+                  <a:tcPr marL="68580" marR="68580" marT="0" marB="0"/>
+                </a:tc>
+                <a:tc>
+                  <a:txBody>
+                    <a:bodyPr/>
+                    <a:lstStyle/>
+                    <a:p>
+                      <a:pPr>
+                        <a:lnSpc>
+                          <a:spcPct val="107000"/>
+                        </a:lnSpc>
+                        <a:spcAft>
+                          <a:spcPts val="0"/>
+                        </a:spcAft>
+                      </a:pPr>
+                      <a:r>
+                        <a:rPr lang="en-US" sz="1400">
+                          <a:effectLst/>
+                        </a:rPr>
+                        <a:t>0.8475 – </a:t>
+                      </a:r>
+                      <a:r>
+                        <a:rPr lang="ru-RU" sz="1400">
+                          <a:effectLst/>
+                        </a:rPr>
+                        <a:t>не значимо</a:t>
+                      </a:r>
+                      <a:endParaRPr lang="ru-RU" sz="1400">
+                        <a:effectLst/>
+                        <a:latin typeface="Calibri" panose="020F0502020204030204" pitchFamily="34" charset="0"/>
+                        <a:ea typeface="Calibri" panose="020F0502020204030204" pitchFamily="34" charset="0"/>
+                        <a:cs typeface="Times New Roman" panose="02020603050405020304" pitchFamily="18" charset="0"/>
+                      </a:endParaRPr>
+                    </a:p>
+                  </a:txBody>
+                  <a:tcPr marL="68580" marR="68580" marT="0" marB="0"/>
+                </a:tc>
+                <a:extLst>
+                  <a:ext uri="{0D108BD9-81ED-4DB2-BD59-A6C34878D82A}">
+                    <a16:rowId xmlns:a16="http://schemas.microsoft.com/office/drawing/2014/main" val="3102337891"/>
+                  </a:ext>
+                </a:extLst>
+              </a:tr>
+              <a:tr h="291104">
+                <a:tc>
+                  <a:txBody>
+                    <a:bodyPr/>
+                    <a:lstStyle/>
+                    <a:p>
+                      <a:pPr>
+                        <a:lnSpc>
+                          <a:spcPct val="107000"/>
+                        </a:lnSpc>
+                        <a:spcAft>
+                          <a:spcPts val="0"/>
+                        </a:spcAft>
+                      </a:pPr>
+                      <a:r>
+                        <a:rPr lang="ru-RU" sz="1400">
+                          <a:effectLst/>
+                        </a:rPr>
+                        <a:t>RPS</a:t>
+                      </a:r>
+                      <a:endParaRPr lang="ru-RU" sz="1400">
+                        <a:effectLst/>
+                        <a:latin typeface="Calibri" panose="020F0502020204030204" pitchFamily="34" charset="0"/>
+                        <a:ea typeface="Calibri" panose="020F0502020204030204" pitchFamily="34" charset="0"/>
+                        <a:cs typeface="Times New Roman" panose="02020603050405020304" pitchFamily="18" charset="0"/>
+                      </a:endParaRPr>
+                    </a:p>
+                  </a:txBody>
+                  <a:tcPr marL="68580" marR="68580" marT="0" marB="0"/>
+                </a:tc>
+                <a:tc>
+                  <a:txBody>
+                    <a:bodyPr/>
+                    <a:lstStyle/>
+                    <a:p>
+                      <a:pPr algn="ctr">
+                        <a:lnSpc>
+                          <a:spcPct val="107000"/>
+                        </a:lnSpc>
+                        <a:spcAft>
+                          <a:spcPts val="0"/>
+                        </a:spcAft>
+                      </a:pPr>
+                      <a:r>
+                        <a:rPr lang="en-US" sz="1400" dirty="0">
+                          <a:effectLst/>
+                        </a:rPr>
+                        <a:t>0.0048</a:t>
+                      </a:r>
+                      <a:endParaRPr lang="ru-RU" sz="1400" dirty="0">
+                        <a:effectLst/>
+                        <a:latin typeface="Calibri" panose="020F0502020204030204" pitchFamily="34" charset="0"/>
+                        <a:ea typeface="Calibri" panose="020F0502020204030204" pitchFamily="34" charset="0"/>
+                        <a:cs typeface="Times New Roman" panose="02020603050405020304" pitchFamily="18" charset="0"/>
+                      </a:endParaRPr>
+                    </a:p>
+                  </a:txBody>
+                  <a:tcPr marL="68580" marR="68580" marT="0" marB="0"/>
+                </a:tc>
+                <a:tc>
+                  <a:txBody>
+                    <a:bodyPr/>
+                    <a:lstStyle/>
+                    <a:p>
+                      <a:pPr algn="ctr">
+                        <a:lnSpc>
+                          <a:spcPct val="107000"/>
+                        </a:lnSpc>
+                        <a:spcAft>
+                          <a:spcPts val="0"/>
+                        </a:spcAft>
+                      </a:pPr>
+                      <a:r>
+                        <a:rPr lang="en-US" sz="1400">
+                          <a:effectLst/>
+                        </a:rPr>
+                        <a:t>0.0048</a:t>
+                      </a:r>
+                      <a:endParaRPr lang="ru-RU" sz="1400">
+                        <a:effectLst/>
+                        <a:latin typeface="Calibri" panose="020F0502020204030204" pitchFamily="34" charset="0"/>
+                        <a:ea typeface="Calibri" panose="020F0502020204030204" pitchFamily="34" charset="0"/>
+                        <a:cs typeface="Times New Roman" panose="02020603050405020304" pitchFamily="18" charset="0"/>
+                      </a:endParaRPr>
+                    </a:p>
+                  </a:txBody>
+                  <a:tcPr marL="68580" marR="68580" marT="0" marB="0"/>
+                </a:tc>
+                <a:tc>
+                  <a:txBody>
+                    <a:bodyPr/>
+                    <a:lstStyle/>
+                    <a:p>
+                      <a:pPr algn="ctr">
+                        <a:lnSpc>
+                          <a:spcPct val="107000"/>
+                        </a:lnSpc>
+                        <a:spcAft>
+                          <a:spcPts val="0"/>
+                        </a:spcAft>
+                      </a:pPr>
+                      <a:r>
+                        <a:rPr lang="en-US" sz="1400">
+                          <a:effectLst/>
+                        </a:rPr>
+                        <a:t>0 </a:t>
+                      </a:r>
+                      <a:r>
+                        <a:rPr lang="ru-RU" sz="1400">
+                          <a:effectLst/>
+                        </a:rPr>
+                        <a:t>%</a:t>
+                      </a:r>
+                      <a:r>
+                        <a:rPr lang="en-US" sz="1400">
+                          <a:effectLst/>
+                        </a:rPr>
+                        <a:t> ↑</a:t>
+                      </a:r>
+                      <a:endParaRPr lang="ru-RU" sz="1400">
+                        <a:effectLst/>
+                        <a:latin typeface="Calibri" panose="020F0502020204030204" pitchFamily="34" charset="0"/>
+                        <a:ea typeface="Calibri" panose="020F0502020204030204" pitchFamily="34" charset="0"/>
+                        <a:cs typeface="Times New Roman" panose="02020603050405020304" pitchFamily="18" charset="0"/>
+                      </a:endParaRPr>
+                    </a:p>
+                  </a:txBody>
+                  <a:tcPr marL="68580" marR="68580" marT="0" marB="0"/>
+                </a:tc>
+                <a:tc>
+                  <a:txBody>
+                    <a:bodyPr/>
+                    <a:lstStyle/>
+                    <a:p>
+                      <a:pPr>
+                        <a:lnSpc>
+                          <a:spcPct val="107000"/>
+                        </a:lnSpc>
+                        <a:spcAft>
+                          <a:spcPts val="0"/>
+                        </a:spcAft>
+                      </a:pPr>
+                      <a:r>
+                        <a:rPr lang="en-US" sz="1400">
+                          <a:effectLst/>
+                        </a:rPr>
+                        <a:t>0.981 – </a:t>
+                      </a:r>
+                      <a:r>
+                        <a:rPr lang="ru-RU" sz="1400">
+                          <a:effectLst/>
+                        </a:rPr>
+                        <a:t>не значимо</a:t>
+                      </a:r>
+                      <a:endParaRPr lang="ru-RU" sz="1400">
+                        <a:effectLst/>
+                        <a:latin typeface="Calibri" panose="020F0502020204030204" pitchFamily="34" charset="0"/>
+                        <a:ea typeface="Calibri" panose="020F0502020204030204" pitchFamily="34" charset="0"/>
+                        <a:cs typeface="Times New Roman" panose="02020603050405020304" pitchFamily="18" charset="0"/>
+                      </a:endParaRPr>
+                    </a:p>
+                  </a:txBody>
+                  <a:tcPr marL="68580" marR="68580" marT="0" marB="0"/>
+                </a:tc>
+                <a:extLst>
+                  <a:ext uri="{0D108BD9-81ED-4DB2-BD59-A6C34878D82A}">
+                    <a16:rowId xmlns:a16="http://schemas.microsoft.com/office/drawing/2014/main" val="604655245"/>
+                  </a:ext>
+                </a:extLst>
+              </a:tr>
+              <a:tr h="291104">
+                <a:tc>
+                  <a:txBody>
+                    <a:bodyPr/>
+                    <a:lstStyle/>
+                    <a:p>
+                      <a:pPr>
+                        <a:lnSpc>
+                          <a:spcPct val="107000"/>
+                        </a:lnSpc>
+                        <a:spcAft>
+                          <a:spcPts val="0"/>
+                        </a:spcAft>
+                      </a:pPr>
+                      <a:r>
+                        <a:rPr lang="ru-RU" sz="1400">
+                          <a:effectLst/>
+                        </a:rPr>
+                        <a:t>Paid CTR</a:t>
+                      </a:r>
+                      <a:endParaRPr lang="ru-RU" sz="1400">
+                        <a:effectLst/>
+                        <a:latin typeface="Calibri" panose="020F0502020204030204" pitchFamily="34" charset="0"/>
+                        <a:ea typeface="Calibri" panose="020F0502020204030204" pitchFamily="34" charset="0"/>
+                        <a:cs typeface="Times New Roman" panose="02020603050405020304" pitchFamily="18" charset="0"/>
+                      </a:endParaRPr>
+                    </a:p>
+                  </a:txBody>
+                  <a:tcPr marL="68580" marR="68580" marT="0" marB="0"/>
+                </a:tc>
+                <a:tc>
+                  <a:txBody>
+                    <a:bodyPr/>
+                    <a:lstStyle/>
+                    <a:p>
+                      <a:pPr algn="ctr">
+                        <a:lnSpc>
+                          <a:spcPct val="107000"/>
+                        </a:lnSpc>
+                        <a:spcAft>
+                          <a:spcPts val="0"/>
+                        </a:spcAft>
+                      </a:pPr>
+                      <a:r>
+                        <a:rPr lang="en-US" sz="1400" dirty="0">
+                          <a:effectLst/>
+                        </a:rPr>
+                        <a:t>0.0216</a:t>
+                      </a:r>
+                      <a:endParaRPr lang="ru-RU" sz="1400" dirty="0">
+                        <a:effectLst/>
+                        <a:latin typeface="Calibri" panose="020F0502020204030204" pitchFamily="34" charset="0"/>
+                        <a:ea typeface="Calibri" panose="020F0502020204030204" pitchFamily="34" charset="0"/>
+                        <a:cs typeface="Times New Roman" panose="02020603050405020304" pitchFamily="18" charset="0"/>
+                      </a:endParaRPr>
+                    </a:p>
+                  </a:txBody>
+                  <a:tcPr marL="68580" marR="68580" marT="0" marB="0"/>
+                </a:tc>
+                <a:tc>
+                  <a:txBody>
+                    <a:bodyPr/>
+                    <a:lstStyle/>
+                    <a:p>
+                      <a:pPr algn="ctr">
+                        <a:lnSpc>
+                          <a:spcPct val="107000"/>
+                        </a:lnSpc>
+                        <a:spcAft>
+                          <a:spcPts val="0"/>
+                        </a:spcAft>
+                      </a:pPr>
+                      <a:r>
+                        <a:rPr lang="en-US" sz="1400" dirty="0">
+                          <a:effectLst/>
+                        </a:rPr>
+                        <a:t>0.0231</a:t>
+                      </a:r>
+                      <a:endParaRPr lang="ru-RU" sz="1400" dirty="0">
+                        <a:effectLst/>
+                        <a:latin typeface="Calibri" panose="020F0502020204030204" pitchFamily="34" charset="0"/>
+                        <a:ea typeface="Calibri" panose="020F0502020204030204" pitchFamily="34" charset="0"/>
+                        <a:cs typeface="Times New Roman" panose="02020603050405020304" pitchFamily="18" charset="0"/>
+                      </a:endParaRPr>
+                    </a:p>
+                  </a:txBody>
+                  <a:tcPr marL="68580" marR="68580" marT="0" marB="0"/>
+                </a:tc>
+                <a:tc>
+                  <a:txBody>
+                    <a:bodyPr/>
+                    <a:lstStyle/>
+                    <a:p>
+                      <a:pPr algn="ctr">
+                        <a:lnSpc>
+                          <a:spcPct val="107000"/>
+                        </a:lnSpc>
+                        <a:spcAft>
+                          <a:spcPts val="0"/>
+                        </a:spcAft>
+                      </a:pPr>
+                      <a:r>
+                        <a:rPr lang="en-US" sz="1400">
+                          <a:effectLst/>
+                        </a:rPr>
+                        <a:t>6.9 </a:t>
+                      </a:r>
+                      <a:r>
+                        <a:rPr lang="ru-RU" sz="1400">
+                          <a:effectLst/>
+                        </a:rPr>
+                        <a:t>%</a:t>
+                      </a:r>
+                      <a:r>
+                        <a:rPr lang="en-US" sz="1400">
+                          <a:effectLst/>
+                        </a:rPr>
+                        <a:t> ↑</a:t>
+                      </a:r>
+                      <a:endParaRPr lang="ru-RU" sz="1400">
+                        <a:effectLst/>
+                        <a:latin typeface="Calibri" panose="020F0502020204030204" pitchFamily="34" charset="0"/>
+                        <a:ea typeface="Calibri" panose="020F0502020204030204" pitchFamily="34" charset="0"/>
+                        <a:cs typeface="Times New Roman" panose="02020603050405020304" pitchFamily="18" charset="0"/>
+                      </a:endParaRPr>
+                    </a:p>
+                  </a:txBody>
+                  <a:tcPr marL="68580" marR="68580" marT="0" marB="0"/>
+                </a:tc>
+                <a:tc>
+                  <a:txBody>
+                    <a:bodyPr/>
+                    <a:lstStyle/>
+                    <a:p>
+                      <a:pPr>
+                        <a:lnSpc>
+                          <a:spcPct val="107000"/>
+                        </a:lnSpc>
+                        <a:spcAft>
+                          <a:spcPts val="0"/>
+                        </a:spcAft>
+                      </a:pPr>
+                      <a:r>
+                        <a:rPr lang="en-US" sz="1400">
+                          <a:effectLst/>
+                        </a:rPr>
+                        <a:t>0.654 – </a:t>
+                      </a:r>
+                      <a:r>
+                        <a:rPr lang="ru-RU" sz="1400">
+                          <a:effectLst/>
+                        </a:rPr>
+                        <a:t>не значимо</a:t>
+                      </a:r>
+                      <a:endParaRPr lang="ru-RU" sz="1400">
+                        <a:effectLst/>
+                        <a:latin typeface="Calibri" panose="020F0502020204030204" pitchFamily="34" charset="0"/>
+                        <a:ea typeface="Calibri" panose="020F0502020204030204" pitchFamily="34" charset="0"/>
+                        <a:cs typeface="Times New Roman" panose="02020603050405020304" pitchFamily="18" charset="0"/>
+                      </a:endParaRPr>
+                    </a:p>
+                  </a:txBody>
+                  <a:tcPr marL="68580" marR="68580" marT="0" marB="0"/>
+                </a:tc>
+                <a:extLst>
+                  <a:ext uri="{0D108BD9-81ED-4DB2-BD59-A6C34878D82A}">
+                    <a16:rowId xmlns:a16="http://schemas.microsoft.com/office/drawing/2014/main" val="2888950840"/>
+                  </a:ext>
+                </a:extLst>
+              </a:tr>
+              <a:tr h="291104">
+                <a:tc>
+                  <a:txBody>
+                    <a:bodyPr/>
+                    <a:lstStyle/>
+                    <a:p>
+                      <a:pPr>
+                        <a:lnSpc>
+                          <a:spcPct val="107000"/>
+                        </a:lnSpc>
+                        <a:spcAft>
+                          <a:spcPts val="0"/>
+                        </a:spcAft>
+                      </a:pPr>
+                      <a:r>
+                        <a:rPr lang="ru-RU" sz="1400">
+                          <a:effectLst/>
+                        </a:rPr>
+                        <a:t>Organic CTR</a:t>
+                      </a:r>
+                      <a:endParaRPr lang="ru-RU" sz="1400">
+                        <a:effectLst/>
+                        <a:latin typeface="Calibri" panose="020F0502020204030204" pitchFamily="34" charset="0"/>
+                        <a:ea typeface="Calibri" panose="020F0502020204030204" pitchFamily="34" charset="0"/>
+                        <a:cs typeface="Times New Roman" panose="02020603050405020304" pitchFamily="18" charset="0"/>
+                      </a:endParaRPr>
+                    </a:p>
+                  </a:txBody>
+                  <a:tcPr marL="68580" marR="68580" marT="0" marB="0"/>
+                </a:tc>
+                <a:tc>
+                  <a:txBody>
+                    <a:bodyPr/>
+                    <a:lstStyle/>
+                    <a:p>
+                      <a:pPr algn="ctr">
+                        <a:lnSpc>
+                          <a:spcPct val="107000"/>
+                        </a:lnSpc>
+                        <a:spcAft>
+                          <a:spcPts val="0"/>
+                        </a:spcAft>
+                      </a:pPr>
+                      <a:r>
+                        <a:rPr lang="en-US" sz="1400">
+                          <a:effectLst/>
+                        </a:rPr>
+                        <a:t>0.0706</a:t>
+                      </a:r>
+                      <a:endParaRPr lang="ru-RU" sz="1400">
+                        <a:effectLst/>
+                        <a:latin typeface="Calibri" panose="020F0502020204030204" pitchFamily="34" charset="0"/>
+                        <a:ea typeface="Calibri" panose="020F0502020204030204" pitchFamily="34" charset="0"/>
+                        <a:cs typeface="Times New Roman" panose="02020603050405020304" pitchFamily="18" charset="0"/>
+                      </a:endParaRPr>
+                    </a:p>
+                  </a:txBody>
+                  <a:tcPr marL="68580" marR="68580" marT="0" marB="0"/>
+                </a:tc>
+                <a:tc>
+                  <a:txBody>
+                    <a:bodyPr/>
+                    <a:lstStyle/>
+                    <a:p>
+                      <a:pPr algn="ctr">
+                        <a:lnSpc>
+                          <a:spcPct val="107000"/>
+                        </a:lnSpc>
+                        <a:spcAft>
+                          <a:spcPts val="0"/>
+                        </a:spcAft>
+                      </a:pPr>
+                      <a:r>
+                        <a:rPr lang="en-US" sz="1400" dirty="0">
+                          <a:effectLst/>
+                        </a:rPr>
+                        <a:t>0.0343</a:t>
+                      </a:r>
+                      <a:endParaRPr lang="ru-RU" sz="1400" dirty="0">
+                        <a:effectLst/>
+                        <a:latin typeface="Calibri" panose="020F0502020204030204" pitchFamily="34" charset="0"/>
+                        <a:ea typeface="Calibri" panose="020F0502020204030204" pitchFamily="34" charset="0"/>
+                        <a:cs typeface="Times New Roman" panose="02020603050405020304" pitchFamily="18" charset="0"/>
+                      </a:endParaRPr>
+                    </a:p>
+                  </a:txBody>
+                  <a:tcPr marL="68580" marR="68580" marT="0" marB="0"/>
+                </a:tc>
+                <a:tc>
+                  <a:txBody>
+                    <a:bodyPr/>
+                    <a:lstStyle/>
+                    <a:p>
+                      <a:pPr algn="ctr">
+                        <a:lnSpc>
+                          <a:spcPct val="107000"/>
+                        </a:lnSpc>
+                        <a:spcAft>
+                          <a:spcPts val="0"/>
+                        </a:spcAft>
+                      </a:pPr>
+                      <a:r>
+                        <a:rPr lang="en-US" sz="1400" dirty="0">
+                          <a:solidFill>
+                            <a:schemeClr val="accent5">
+                              <a:lumMod val="60000"/>
+                              <a:lumOff val="40000"/>
+                            </a:schemeClr>
+                          </a:solidFill>
+                          <a:effectLst/>
+                        </a:rPr>
+                        <a:t>-51.4 </a:t>
+                      </a:r>
+                      <a:r>
+                        <a:rPr lang="ru-RU" sz="1400" dirty="0">
+                          <a:solidFill>
+                            <a:schemeClr val="accent5">
+                              <a:lumMod val="60000"/>
+                              <a:lumOff val="40000"/>
+                            </a:schemeClr>
+                          </a:solidFill>
+                          <a:effectLst/>
+                        </a:rPr>
+                        <a:t>% </a:t>
+                      </a:r>
+                      <a:r>
+                        <a:rPr lang="en-US" sz="1400" dirty="0">
+                          <a:solidFill>
+                            <a:schemeClr val="accent5">
+                              <a:lumMod val="60000"/>
+                              <a:lumOff val="40000"/>
+                            </a:schemeClr>
+                          </a:solidFill>
+                          <a:effectLst/>
+                        </a:rPr>
+                        <a:t>↓</a:t>
+                      </a:r>
+                      <a:endParaRPr lang="ru-RU" sz="1400" dirty="0">
+                        <a:solidFill>
+                          <a:schemeClr val="accent5">
+                            <a:lumMod val="60000"/>
+                            <a:lumOff val="40000"/>
+                          </a:schemeClr>
+                        </a:solidFill>
+                        <a:effectLst/>
+                        <a:latin typeface="Calibri" panose="020F0502020204030204" pitchFamily="34" charset="0"/>
+                        <a:ea typeface="Calibri" panose="020F0502020204030204" pitchFamily="34" charset="0"/>
+                        <a:cs typeface="Times New Roman" panose="02020603050405020304" pitchFamily="18" charset="0"/>
+                      </a:endParaRPr>
+                    </a:p>
+                  </a:txBody>
+                  <a:tcPr marL="68580" marR="68580" marT="0" marB="0"/>
+                </a:tc>
+                <a:tc>
+                  <a:txBody>
+                    <a:bodyPr/>
+                    <a:lstStyle/>
+                    <a:p>
+                      <a:pPr>
+                        <a:lnSpc>
+                          <a:spcPct val="107000"/>
+                        </a:lnSpc>
+                        <a:spcAft>
+                          <a:spcPts val="0"/>
+                        </a:spcAft>
+                      </a:pPr>
+                      <a:r>
+                        <a:rPr lang="en-US" sz="1400" dirty="0">
+                          <a:effectLst/>
+                        </a:rPr>
+                        <a:t>0 – </a:t>
+                      </a:r>
+                      <a:r>
+                        <a:rPr lang="ru-RU" sz="1400" dirty="0">
+                          <a:solidFill>
+                            <a:schemeClr val="accent5">
+                              <a:lumMod val="60000"/>
+                              <a:lumOff val="40000"/>
+                            </a:schemeClr>
+                          </a:solidFill>
+                          <a:effectLst/>
+                        </a:rPr>
+                        <a:t>значимо</a:t>
+                      </a:r>
+                      <a:endParaRPr lang="ru-RU" sz="1400" dirty="0">
+                        <a:solidFill>
+                          <a:schemeClr val="accent5">
+                            <a:lumMod val="60000"/>
+                            <a:lumOff val="40000"/>
+                          </a:schemeClr>
+                        </a:solidFill>
+                        <a:effectLst/>
+                        <a:latin typeface="Calibri" panose="020F0502020204030204" pitchFamily="34" charset="0"/>
+                        <a:ea typeface="Calibri" panose="020F0502020204030204" pitchFamily="34" charset="0"/>
+                        <a:cs typeface="Times New Roman" panose="02020603050405020304" pitchFamily="18" charset="0"/>
+                      </a:endParaRPr>
+                    </a:p>
+                  </a:txBody>
+                  <a:tcPr marL="68580" marR="68580" marT="0" marB="0"/>
+                </a:tc>
+                <a:extLst>
+                  <a:ext uri="{0D108BD9-81ED-4DB2-BD59-A6C34878D82A}">
+                    <a16:rowId xmlns:a16="http://schemas.microsoft.com/office/drawing/2014/main" val="2262487605"/>
+                  </a:ext>
+                </a:extLst>
+              </a:tr>
+              <a:tr h="291104">
+                <a:tc gridSpan="5">
+                  <a:txBody>
+                    <a:bodyPr/>
+                    <a:lstStyle/>
+                    <a:p>
+                      <a:pPr algn="ctr">
+                        <a:lnSpc>
+                          <a:spcPct val="107000"/>
+                        </a:lnSpc>
+                        <a:spcAft>
+                          <a:spcPts val="0"/>
+                        </a:spcAft>
+                      </a:pPr>
+                      <a:r>
+                        <a:rPr lang="en-US" sz="1400" dirty="0">
+                          <a:effectLst/>
+                        </a:rPr>
+                        <a:t>Mobile</a:t>
+                      </a:r>
+                      <a:endParaRPr lang="ru-RU" sz="1400" dirty="0">
+                        <a:effectLst/>
+                        <a:latin typeface="Calibri" panose="020F0502020204030204" pitchFamily="34" charset="0"/>
+                        <a:ea typeface="Calibri" panose="020F0502020204030204" pitchFamily="34" charset="0"/>
+                        <a:cs typeface="Times New Roman" panose="02020603050405020304" pitchFamily="18" charset="0"/>
+                      </a:endParaRPr>
+                    </a:p>
+                  </a:txBody>
+                  <a:tcPr marL="68580" marR="68580" marT="0" marB="0"/>
+                </a:tc>
+                <a:tc hMerge="1">
+                  <a:txBody>
+                    <a:bodyPr/>
+                    <a:lstStyle/>
+                    <a:p>
+                      <a:endParaRPr lang="ru-RU"/>
+                    </a:p>
+                  </a:txBody>
+                  <a:tcPr/>
+                </a:tc>
+                <a:tc hMerge="1">
+                  <a:txBody>
+                    <a:bodyPr/>
+                    <a:lstStyle/>
+                    <a:p>
+                      <a:endParaRPr lang="ru-RU"/>
+                    </a:p>
+                  </a:txBody>
+                  <a:tcPr/>
+                </a:tc>
+                <a:tc hMerge="1">
+                  <a:txBody>
+                    <a:bodyPr/>
+                    <a:lstStyle/>
+                    <a:p>
+                      <a:endParaRPr lang="ru-RU"/>
+                    </a:p>
+                  </a:txBody>
+                  <a:tcPr/>
+                </a:tc>
+                <a:tc hMerge="1">
+                  <a:txBody>
+                    <a:bodyPr/>
+                    <a:lstStyle/>
+                    <a:p>
+                      <a:endParaRPr lang="ru-RU"/>
+                    </a:p>
+                  </a:txBody>
+                  <a:tcPr/>
+                </a:tc>
+                <a:extLst>
+                  <a:ext uri="{0D108BD9-81ED-4DB2-BD59-A6C34878D82A}">
+                    <a16:rowId xmlns:a16="http://schemas.microsoft.com/office/drawing/2014/main" val="2230522275"/>
+                  </a:ext>
+                </a:extLst>
+              </a:tr>
+              <a:tr h="291104">
+                <a:tc>
+                  <a:txBody>
+                    <a:bodyPr/>
+                    <a:lstStyle/>
+                    <a:p>
+                      <a:pPr>
+                        <a:lnSpc>
+                          <a:spcPct val="107000"/>
+                        </a:lnSpc>
+                        <a:spcAft>
+                          <a:spcPts val="0"/>
+                        </a:spcAft>
+                      </a:pPr>
+                      <a:r>
+                        <a:rPr lang="ru-RU" sz="1400">
+                          <a:effectLst/>
+                        </a:rPr>
+                        <a:t>RPM</a:t>
+                      </a:r>
+                      <a:endParaRPr lang="ru-RU" sz="1400">
+                        <a:effectLst/>
+                        <a:latin typeface="Calibri" panose="020F0502020204030204" pitchFamily="34" charset="0"/>
+                        <a:ea typeface="Calibri" panose="020F0502020204030204" pitchFamily="34" charset="0"/>
+                        <a:cs typeface="Times New Roman" panose="02020603050405020304" pitchFamily="18" charset="0"/>
+                      </a:endParaRPr>
+                    </a:p>
+                  </a:txBody>
+                  <a:tcPr marL="68580" marR="68580" marT="0" marB="0"/>
+                </a:tc>
+                <a:tc>
+                  <a:txBody>
+                    <a:bodyPr/>
+                    <a:lstStyle/>
+                    <a:p>
+                      <a:pPr algn="ctr">
+                        <a:lnSpc>
+                          <a:spcPct val="107000"/>
+                        </a:lnSpc>
+                        <a:spcAft>
+                          <a:spcPts val="0"/>
+                        </a:spcAft>
+                      </a:pPr>
+                      <a:r>
+                        <a:rPr lang="en-US" sz="1400">
+                          <a:effectLst/>
+                        </a:rPr>
+                        <a:t>3.0721</a:t>
+                      </a:r>
+                      <a:endParaRPr lang="ru-RU" sz="1400">
+                        <a:effectLst/>
+                        <a:latin typeface="Calibri" panose="020F0502020204030204" pitchFamily="34" charset="0"/>
+                        <a:ea typeface="Calibri" panose="020F0502020204030204" pitchFamily="34" charset="0"/>
+                        <a:cs typeface="Times New Roman" panose="02020603050405020304" pitchFamily="18" charset="0"/>
+                      </a:endParaRPr>
+                    </a:p>
+                  </a:txBody>
+                  <a:tcPr marL="68580" marR="68580" marT="0" marB="0"/>
+                </a:tc>
+                <a:tc>
+                  <a:txBody>
+                    <a:bodyPr/>
+                    <a:lstStyle/>
+                    <a:p>
+                      <a:pPr algn="ctr">
+                        <a:lnSpc>
+                          <a:spcPct val="107000"/>
+                        </a:lnSpc>
+                        <a:spcAft>
+                          <a:spcPts val="0"/>
+                        </a:spcAft>
+                      </a:pPr>
+                      <a:r>
+                        <a:rPr lang="en-US" sz="1400" dirty="0">
+                          <a:effectLst/>
+                        </a:rPr>
+                        <a:t>4.0514</a:t>
+                      </a:r>
+                      <a:endParaRPr lang="ru-RU" sz="1400" dirty="0">
+                        <a:effectLst/>
+                        <a:latin typeface="Calibri" panose="020F0502020204030204" pitchFamily="34" charset="0"/>
+                        <a:ea typeface="Calibri" panose="020F0502020204030204" pitchFamily="34" charset="0"/>
+                        <a:cs typeface="Times New Roman" panose="02020603050405020304" pitchFamily="18" charset="0"/>
+                      </a:endParaRPr>
+                    </a:p>
+                  </a:txBody>
+                  <a:tcPr marL="68580" marR="68580" marT="0" marB="0"/>
+                </a:tc>
+                <a:tc>
+                  <a:txBody>
+                    <a:bodyPr/>
+                    <a:lstStyle/>
+                    <a:p>
+                      <a:pPr algn="ctr">
+                        <a:lnSpc>
+                          <a:spcPct val="107000"/>
+                        </a:lnSpc>
+                        <a:spcAft>
+                          <a:spcPts val="0"/>
+                        </a:spcAft>
+                      </a:pPr>
+                      <a:r>
+                        <a:rPr lang="en-US" sz="1400" dirty="0">
+                          <a:effectLst/>
+                        </a:rPr>
+                        <a:t>31.9 </a:t>
+                      </a:r>
+                      <a:r>
+                        <a:rPr lang="ru-RU" sz="1400" dirty="0">
+                          <a:effectLst/>
+                        </a:rPr>
+                        <a:t>%</a:t>
+                      </a:r>
+                      <a:r>
+                        <a:rPr lang="en-US" sz="1400" dirty="0">
+                          <a:effectLst/>
+                        </a:rPr>
+                        <a:t> ↑</a:t>
+                      </a:r>
+                      <a:endParaRPr lang="ru-RU" sz="1400" dirty="0">
+                        <a:effectLst/>
+                        <a:latin typeface="Calibri" panose="020F0502020204030204" pitchFamily="34" charset="0"/>
+                        <a:ea typeface="Calibri" panose="020F0502020204030204" pitchFamily="34" charset="0"/>
+                        <a:cs typeface="Times New Roman" panose="02020603050405020304" pitchFamily="18" charset="0"/>
+                      </a:endParaRPr>
+                    </a:p>
+                  </a:txBody>
+                  <a:tcPr marL="68580" marR="68580" marT="0" marB="0"/>
+                </a:tc>
+                <a:tc>
+                  <a:txBody>
+                    <a:bodyPr/>
+                    <a:lstStyle/>
+                    <a:p>
+                      <a:pPr>
+                        <a:lnSpc>
+                          <a:spcPct val="107000"/>
+                        </a:lnSpc>
+                        <a:spcAft>
+                          <a:spcPts val="0"/>
+                        </a:spcAft>
+                      </a:pPr>
+                      <a:r>
+                        <a:rPr lang="en-US" sz="1400">
+                          <a:effectLst/>
+                        </a:rPr>
+                        <a:t>0.3275 – </a:t>
+                      </a:r>
+                      <a:r>
+                        <a:rPr lang="ru-RU" sz="1400">
+                          <a:effectLst/>
+                        </a:rPr>
+                        <a:t>не значимо</a:t>
+                      </a:r>
+                      <a:endParaRPr lang="ru-RU" sz="1400">
+                        <a:effectLst/>
+                        <a:latin typeface="Calibri" panose="020F0502020204030204" pitchFamily="34" charset="0"/>
+                        <a:ea typeface="Calibri" panose="020F0502020204030204" pitchFamily="34" charset="0"/>
+                        <a:cs typeface="Times New Roman" panose="02020603050405020304" pitchFamily="18" charset="0"/>
+                      </a:endParaRPr>
+                    </a:p>
+                  </a:txBody>
+                  <a:tcPr marL="68580" marR="68580" marT="0" marB="0"/>
+                </a:tc>
+                <a:extLst>
+                  <a:ext uri="{0D108BD9-81ED-4DB2-BD59-A6C34878D82A}">
+                    <a16:rowId xmlns:a16="http://schemas.microsoft.com/office/drawing/2014/main" val="2853404959"/>
+                  </a:ext>
+                </a:extLst>
+              </a:tr>
+              <a:tr h="291104">
+                <a:tc>
+                  <a:txBody>
+                    <a:bodyPr/>
+                    <a:lstStyle/>
+                    <a:p>
+                      <a:pPr>
+                        <a:lnSpc>
+                          <a:spcPct val="107000"/>
+                        </a:lnSpc>
+                        <a:spcAft>
+                          <a:spcPts val="0"/>
+                        </a:spcAft>
+                      </a:pPr>
+                      <a:r>
+                        <a:rPr lang="ru-RU" sz="1400">
+                          <a:effectLst/>
+                        </a:rPr>
+                        <a:t>RPS</a:t>
+                      </a:r>
+                      <a:endParaRPr lang="ru-RU" sz="1400">
+                        <a:effectLst/>
+                        <a:latin typeface="Calibri" panose="020F0502020204030204" pitchFamily="34" charset="0"/>
+                        <a:ea typeface="Calibri" panose="020F0502020204030204" pitchFamily="34" charset="0"/>
+                        <a:cs typeface="Times New Roman" panose="02020603050405020304" pitchFamily="18" charset="0"/>
+                      </a:endParaRPr>
+                    </a:p>
+                  </a:txBody>
+                  <a:tcPr marL="68580" marR="68580" marT="0" marB="0"/>
+                </a:tc>
+                <a:tc>
+                  <a:txBody>
+                    <a:bodyPr/>
+                    <a:lstStyle/>
+                    <a:p>
+                      <a:pPr algn="ctr">
+                        <a:lnSpc>
+                          <a:spcPct val="107000"/>
+                        </a:lnSpc>
+                        <a:spcAft>
+                          <a:spcPts val="0"/>
+                        </a:spcAft>
+                      </a:pPr>
+                      <a:r>
+                        <a:rPr lang="en-US" sz="1400">
+                          <a:effectLst/>
+                        </a:rPr>
+                        <a:t>0.005</a:t>
+                      </a:r>
+                      <a:endParaRPr lang="ru-RU" sz="1400">
+                        <a:effectLst/>
+                        <a:latin typeface="Calibri" panose="020F0502020204030204" pitchFamily="34" charset="0"/>
+                        <a:ea typeface="Calibri" panose="020F0502020204030204" pitchFamily="34" charset="0"/>
+                        <a:cs typeface="Times New Roman" panose="02020603050405020304" pitchFamily="18" charset="0"/>
+                      </a:endParaRPr>
+                    </a:p>
+                  </a:txBody>
+                  <a:tcPr marL="68580" marR="68580" marT="0" marB="0"/>
+                </a:tc>
+                <a:tc>
+                  <a:txBody>
+                    <a:bodyPr/>
+                    <a:lstStyle/>
+                    <a:p>
+                      <a:pPr algn="ctr">
+                        <a:lnSpc>
+                          <a:spcPct val="107000"/>
+                        </a:lnSpc>
+                        <a:spcAft>
+                          <a:spcPts val="0"/>
+                        </a:spcAft>
+                      </a:pPr>
+                      <a:r>
+                        <a:rPr lang="en-US" sz="1400">
+                          <a:effectLst/>
+                        </a:rPr>
+                        <a:t>0.0063</a:t>
+                      </a:r>
+                      <a:endParaRPr lang="ru-RU" sz="1400">
+                        <a:effectLst/>
+                        <a:latin typeface="Calibri" panose="020F0502020204030204" pitchFamily="34" charset="0"/>
+                        <a:ea typeface="Calibri" panose="020F0502020204030204" pitchFamily="34" charset="0"/>
+                        <a:cs typeface="Times New Roman" panose="02020603050405020304" pitchFamily="18" charset="0"/>
+                      </a:endParaRPr>
+                    </a:p>
+                  </a:txBody>
+                  <a:tcPr marL="68580" marR="68580" marT="0" marB="0"/>
+                </a:tc>
+                <a:tc>
+                  <a:txBody>
+                    <a:bodyPr/>
+                    <a:lstStyle/>
+                    <a:p>
+                      <a:pPr algn="ctr">
+                        <a:lnSpc>
+                          <a:spcPct val="107000"/>
+                        </a:lnSpc>
+                        <a:spcAft>
+                          <a:spcPts val="0"/>
+                        </a:spcAft>
+                      </a:pPr>
+                      <a:r>
+                        <a:rPr lang="en-US" sz="1400" dirty="0">
+                          <a:effectLst/>
+                        </a:rPr>
+                        <a:t>26 </a:t>
+                      </a:r>
+                      <a:r>
+                        <a:rPr lang="ru-RU" sz="1400" dirty="0">
+                          <a:effectLst/>
+                        </a:rPr>
+                        <a:t>%</a:t>
+                      </a:r>
+                      <a:r>
+                        <a:rPr lang="en-US" sz="1400" dirty="0">
+                          <a:effectLst/>
+                        </a:rPr>
+                        <a:t>   ↑</a:t>
+                      </a:r>
+                      <a:endParaRPr lang="ru-RU" sz="1400" dirty="0">
+                        <a:effectLst/>
+                        <a:latin typeface="Calibri" panose="020F0502020204030204" pitchFamily="34" charset="0"/>
+                        <a:ea typeface="Calibri" panose="020F0502020204030204" pitchFamily="34" charset="0"/>
+                        <a:cs typeface="Times New Roman" panose="02020603050405020304" pitchFamily="18" charset="0"/>
+                      </a:endParaRPr>
+                    </a:p>
+                  </a:txBody>
+                  <a:tcPr marL="68580" marR="68580" marT="0" marB="0"/>
+                </a:tc>
+                <a:tc>
+                  <a:txBody>
+                    <a:bodyPr/>
+                    <a:lstStyle/>
+                    <a:p>
+                      <a:pPr>
+                        <a:lnSpc>
+                          <a:spcPct val="107000"/>
+                        </a:lnSpc>
+                        <a:spcAft>
+                          <a:spcPts val="0"/>
+                        </a:spcAft>
+                      </a:pPr>
+                      <a:r>
+                        <a:rPr lang="en-US" sz="1400">
+                          <a:effectLst/>
+                        </a:rPr>
+                        <a:t>0.4146 – </a:t>
+                      </a:r>
+                      <a:r>
+                        <a:rPr lang="ru-RU" sz="1400">
+                          <a:effectLst/>
+                        </a:rPr>
+                        <a:t>не значимо</a:t>
+                      </a:r>
+                      <a:endParaRPr lang="ru-RU" sz="1400">
+                        <a:effectLst/>
+                        <a:latin typeface="Calibri" panose="020F0502020204030204" pitchFamily="34" charset="0"/>
+                        <a:ea typeface="Calibri" panose="020F0502020204030204" pitchFamily="34" charset="0"/>
+                        <a:cs typeface="Times New Roman" panose="02020603050405020304" pitchFamily="18" charset="0"/>
+                      </a:endParaRPr>
+                    </a:p>
+                  </a:txBody>
+                  <a:tcPr marL="68580" marR="68580" marT="0" marB="0"/>
+                </a:tc>
+                <a:extLst>
+                  <a:ext uri="{0D108BD9-81ED-4DB2-BD59-A6C34878D82A}">
+                    <a16:rowId xmlns:a16="http://schemas.microsoft.com/office/drawing/2014/main" val="161401926"/>
+                  </a:ext>
+                </a:extLst>
+              </a:tr>
+              <a:tr h="291104">
+                <a:tc>
+                  <a:txBody>
+                    <a:bodyPr/>
+                    <a:lstStyle/>
+                    <a:p>
+                      <a:pPr>
+                        <a:lnSpc>
+                          <a:spcPct val="107000"/>
+                        </a:lnSpc>
+                        <a:spcAft>
+                          <a:spcPts val="0"/>
+                        </a:spcAft>
+                      </a:pPr>
+                      <a:r>
+                        <a:rPr lang="ru-RU" sz="1400">
+                          <a:effectLst/>
+                        </a:rPr>
+                        <a:t>Paid CTR</a:t>
+                      </a:r>
+                      <a:endParaRPr lang="ru-RU" sz="1400">
+                        <a:effectLst/>
+                        <a:latin typeface="Calibri" panose="020F0502020204030204" pitchFamily="34" charset="0"/>
+                        <a:ea typeface="Calibri" panose="020F0502020204030204" pitchFamily="34" charset="0"/>
+                        <a:cs typeface="Times New Roman" panose="02020603050405020304" pitchFamily="18" charset="0"/>
+                      </a:endParaRPr>
+                    </a:p>
+                  </a:txBody>
+                  <a:tcPr marL="68580" marR="68580" marT="0" marB="0"/>
+                </a:tc>
+                <a:tc>
+                  <a:txBody>
+                    <a:bodyPr/>
+                    <a:lstStyle/>
+                    <a:p>
+                      <a:pPr algn="ctr">
+                        <a:lnSpc>
+                          <a:spcPct val="107000"/>
+                        </a:lnSpc>
+                        <a:spcAft>
+                          <a:spcPts val="0"/>
+                        </a:spcAft>
+                      </a:pPr>
+                      <a:r>
+                        <a:rPr lang="en-US" sz="1400">
+                          <a:effectLst/>
+                        </a:rPr>
+                        <a:t>0.0203</a:t>
+                      </a:r>
+                      <a:endParaRPr lang="ru-RU" sz="1400">
+                        <a:effectLst/>
+                        <a:latin typeface="Calibri" panose="020F0502020204030204" pitchFamily="34" charset="0"/>
+                        <a:ea typeface="Calibri" panose="020F0502020204030204" pitchFamily="34" charset="0"/>
+                        <a:cs typeface="Times New Roman" panose="02020603050405020304" pitchFamily="18" charset="0"/>
+                      </a:endParaRPr>
+                    </a:p>
+                  </a:txBody>
+                  <a:tcPr marL="68580" marR="68580" marT="0" marB="0"/>
+                </a:tc>
+                <a:tc>
+                  <a:txBody>
+                    <a:bodyPr/>
+                    <a:lstStyle/>
+                    <a:p>
+                      <a:pPr algn="ctr">
+                        <a:lnSpc>
+                          <a:spcPct val="107000"/>
+                        </a:lnSpc>
+                        <a:spcAft>
+                          <a:spcPts val="0"/>
+                        </a:spcAft>
+                      </a:pPr>
+                      <a:r>
+                        <a:rPr lang="en-US" sz="1400">
+                          <a:effectLst/>
+                        </a:rPr>
+                        <a:t>0.0249</a:t>
+                      </a:r>
+                      <a:endParaRPr lang="ru-RU" sz="1400">
+                        <a:effectLst/>
+                        <a:latin typeface="Calibri" panose="020F0502020204030204" pitchFamily="34" charset="0"/>
+                        <a:ea typeface="Calibri" panose="020F0502020204030204" pitchFamily="34" charset="0"/>
+                        <a:cs typeface="Times New Roman" panose="02020603050405020304" pitchFamily="18" charset="0"/>
+                      </a:endParaRPr>
+                    </a:p>
+                  </a:txBody>
+                  <a:tcPr marL="68580" marR="68580" marT="0" marB="0"/>
+                </a:tc>
+                <a:tc>
+                  <a:txBody>
+                    <a:bodyPr/>
+                    <a:lstStyle/>
+                    <a:p>
+                      <a:pPr algn="ctr">
+                        <a:lnSpc>
+                          <a:spcPct val="107000"/>
+                        </a:lnSpc>
+                        <a:spcAft>
+                          <a:spcPts val="0"/>
+                        </a:spcAft>
+                      </a:pPr>
+                      <a:r>
+                        <a:rPr lang="en-US" sz="1400" dirty="0">
+                          <a:effectLst/>
+                        </a:rPr>
+                        <a:t>22.7 </a:t>
+                      </a:r>
+                      <a:r>
+                        <a:rPr lang="ru-RU" sz="1400" dirty="0">
+                          <a:effectLst/>
+                        </a:rPr>
+                        <a:t>%</a:t>
+                      </a:r>
+                      <a:r>
+                        <a:rPr lang="en-US" sz="1400" dirty="0">
+                          <a:effectLst/>
+                        </a:rPr>
+                        <a:t> ↑</a:t>
+                      </a:r>
+                      <a:endParaRPr lang="ru-RU" sz="1400" dirty="0">
+                        <a:effectLst/>
+                        <a:latin typeface="Calibri" panose="020F0502020204030204" pitchFamily="34" charset="0"/>
+                        <a:ea typeface="Calibri" panose="020F0502020204030204" pitchFamily="34" charset="0"/>
+                        <a:cs typeface="Times New Roman" panose="02020603050405020304" pitchFamily="18" charset="0"/>
+                      </a:endParaRPr>
+                    </a:p>
+                  </a:txBody>
+                  <a:tcPr marL="68580" marR="68580" marT="0" marB="0"/>
+                </a:tc>
+                <a:tc>
+                  <a:txBody>
+                    <a:bodyPr/>
+                    <a:lstStyle/>
+                    <a:p>
+                      <a:pPr>
+                        <a:lnSpc>
+                          <a:spcPct val="107000"/>
+                        </a:lnSpc>
+                        <a:spcAft>
+                          <a:spcPts val="0"/>
+                        </a:spcAft>
+                      </a:pPr>
+                      <a:r>
+                        <a:rPr lang="en-US" sz="1400" dirty="0">
+                          <a:effectLst/>
+                        </a:rPr>
+                        <a:t>0.1655 – </a:t>
+                      </a:r>
+                      <a:r>
+                        <a:rPr lang="ru-RU" sz="1400" dirty="0">
+                          <a:effectLst/>
+                        </a:rPr>
+                        <a:t>не значимо</a:t>
+                      </a:r>
+                      <a:endParaRPr lang="ru-RU" sz="1400" dirty="0">
+                        <a:effectLst/>
+                        <a:latin typeface="Calibri" panose="020F0502020204030204" pitchFamily="34" charset="0"/>
+                        <a:ea typeface="Calibri" panose="020F0502020204030204" pitchFamily="34" charset="0"/>
+                        <a:cs typeface="Times New Roman" panose="02020603050405020304" pitchFamily="18" charset="0"/>
+                      </a:endParaRPr>
+                    </a:p>
+                  </a:txBody>
+                  <a:tcPr marL="68580" marR="68580" marT="0" marB="0"/>
+                </a:tc>
+                <a:extLst>
+                  <a:ext uri="{0D108BD9-81ED-4DB2-BD59-A6C34878D82A}">
+                    <a16:rowId xmlns:a16="http://schemas.microsoft.com/office/drawing/2014/main" val="3002983593"/>
+                  </a:ext>
+                </a:extLst>
+              </a:tr>
+              <a:tr h="291104">
+                <a:tc>
+                  <a:txBody>
+                    <a:bodyPr/>
+                    <a:lstStyle/>
+                    <a:p>
+                      <a:pPr>
+                        <a:lnSpc>
+                          <a:spcPct val="107000"/>
+                        </a:lnSpc>
+                        <a:spcAft>
+                          <a:spcPts val="0"/>
+                        </a:spcAft>
+                      </a:pPr>
+                      <a:r>
+                        <a:rPr lang="ru-RU" sz="1400" dirty="0" err="1">
+                          <a:effectLst/>
+                        </a:rPr>
+                        <a:t>Organic</a:t>
+                      </a:r>
+                      <a:r>
+                        <a:rPr lang="ru-RU" sz="1400" dirty="0">
+                          <a:effectLst/>
+                        </a:rPr>
+                        <a:t> CTR</a:t>
+                      </a:r>
+                      <a:endParaRPr lang="ru-RU" sz="1400" dirty="0">
+                        <a:effectLst/>
+                        <a:latin typeface="Calibri" panose="020F0502020204030204" pitchFamily="34" charset="0"/>
+                        <a:ea typeface="Calibri" panose="020F0502020204030204" pitchFamily="34" charset="0"/>
+                        <a:cs typeface="Times New Roman" panose="02020603050405020304" pitchFamily="18" charset="0"/>
+                      </a:endParaRPr>
+                    </a:p>
+                  </a:txBody>
+                  <a:tcPr marL="68580" marR="68580" marT="0" marB="0"/>
+                </a:tc>
+                <a:tc>
+                  <a:txBody>
+                    <a:bodyPr/>
+                    <a:lstStyle/>
+                    <a:p>
+                      <a:pPr algn="ctr">
+                        <a:lnSpc>
+                          <a:spcPct val="107000"/>
+                        </a:lnSpc>
+                        <a:spcAft>
+                          <a:spcPts val="0"/>
+                        </a:spcAft>
+                      </a:pPr>
+                      <a:r>
+                        <a:rPr lang="en-US" sz="1400">
+                          <a:effectLst/>
+                        </a:rPr>
+                        <a:t>0.0634</a:t>
+                      </a:r>
+                      <a:endParaRPr lang="ru-RU" sz="1400">
+                        <a:effectLst/>
+                        <a:latin typeface="Calibri" panose="020F0502020204030204" pitchFamily="34" charset="0"/>
+                        <a:ea typeface="Calibri" panose="020F0502020204030204" pitchFamily="34" charset="0"/>
+                        <a:cs typeface="Times New Roman" panose="02020603050405020304" pitchFamily="18" charset="0"/>
+                      </a:endParaRPr>
+                    </a:p>
+                  </a:txBody>
+                  <a:tcPr marL="68580" marR="68580" marT="0" marB="0"/>
+                </a:tc>
+                <a:tc>
+                  <a:txBody>
+                    <a:bodyPr/>
+                    <a:lstStyle/>
+                    <a:p>
+                      <a:pPr algn="ctr">
+                        <a:lnSpc>
+                          <a:spcPct val="107000"/>
+                        </a:lnSpc>
+                        <a:spcAft>
+                          <a:spcPts val="0"/>
+                        </a:spcAft>
+                      </a:pPr>
+                      <a:r>
+                        <a:rPr lang="en-US" sz="1400">
+                          <a:effectLst/>
+                        </a:rPr>
+                        <a:t>0.0292</a:t>
+                      </a:r>
+                      <a:endParaRPr lang="ru-RU" sz="1400">
+                        <a:effectLst/>
+                        <a:latin typeface="Calibri" panose="020F0502020204030204" pitchFamily="34" charset="0"/>
+                        <a:ea typeface="Calibri" panose="020F0502020204030204" pitchFamily="34" charset="0"/>
+                        <a:cs typeface="Times New Roman" panose="02020603050405020304" pitchFamily="18" charset="0"/>
+                      </a:endParaRPr>
+                    </a:p>
+                  </a:txBody>
+                  <a:tcPr marL="68580" marR="68580" marT="0" marB="0"/>
+                </a:tc>
+                <a:tc>
+                  <a:txBody>
+                    <a:bodyPr/>
+                    <a:lstStyle/>
+                    <a:p>
+                      <a:pPr algn="ctr">
+                        <a:lnSpc>
+                          <a:spcPct val="107000"/>
+                        </a:lnSpc>
+                        <a:spcAft>
+                          <a:spcPts val="0"/>
+                        </a:spcAft>
+                      </a:pPr>
+                      <a:r>
+                        <a:rPr lang="ru-RU" sz="1400" dirty="0">
+                          <a:solidFill>
+                            <a:schemeClr val="accent5">
+                              <a:lumMod val="60000"/>
+                              <a:lumOff val="40000"/>
+                            </a:schemeClr>
+                          </a:solidFill>
+                          <a:effectLst/>
+                        </a:rPr>
+                        <a:t>-53.9 </a:t>
+                      </a:r>
+                      <a:r>
+                        <a:rPr lang="en-US" sz="1400" dirty="0">
+                          <a:solidFill>
+                            <a:schemeClr val="accent5">
+                              <a:lumMod val="60000"/>
+                              <a:lumOff val="40000"/>
+                            </a:schemeClr>
+                          </a:solidFill>
+                          <a:effectLst/>
+                        </a:rPr>
+                        <a:t>% ↓</a:t>
+                      </a:r>
+                      <a:endParaRPr lang="ru-RU" sz="1400" dirty="0">
+                        <a:solidFill>
+                          <a:schemeClr val="accent5">
+                            <a:lumMod val="60000"/>
+                            <a:lumOff val="40000"/>
+                          </a:schemeClr>
+                        </a:solidFill>
+                        <a:effectLst/>
+                        <a:latin typeface="Calibri" panose="020F0502020204030204" pitchFamily="34" charset="0"/>
+                        <a:ea typeface="Calibri" panose="020F0502020204030204" pitchFamily="34" charset="0"/>
+                        <a:cs typeface="Times New Roman" panose="02020603050405020304" pitchFamily="18" charset="0"/>
+                      </a:endParaRPr>
+                    </a:p>
+                  </a:txBody>
+                  <a:tcPr marL="68580" marR="68580" marT="0" marB="0"/>
+                </a:tc>
+                <a:tc>
+                  <a:txBody>
+                    <a:bodyPr/>
+                    <a:lstStyle/>
+                    <a:p>
+                      <a:pPr>
+                        <a:lnSpc>
+                          <a:spcPct val="107000"/>
+                        </a:lnSpc>
+                        <a:spcAft>
+                          <a:spcPts val="0"/>
+                        </a:spcAft>
+                      </a:pPr>
+                      <a:r>
+                        <a:rPr lang="en-US" sz="1400" dirty="0">
+                          <a:effectLst/>
+                        </a:rPr>
+                        <a:t>0 – </a:t>
+                      </a:r>
+                      <a:r>
+                        <a:rPr lang="ru-RU" sz="1400" dirty="0">
+                          <a:solidFill>
+                            <a:schemeClr val="accent5">
+                              <a:lumMod val="60000"/>
+                              <a:lumOff val="40000"/>
+                            </a:schemeClr>
+                          </a:solidFill>
+                          <a:effectLst/>
+                        </a:rPr>
+                        <a:t>значимо</a:t>
+                      </a:r>
+                      <a:endParaRPr lang="ru-RU" sz="1400" dirty="0">
+                        <a:solidFill>
+                          <a:schemeClr val="accent5">
+                            <a:lumMod val="60000"/>
+                            <a:lumOff val="40000"/>
+                          </a:schemeClr>
+                        </a:solidFill>
+                        <a:effectLst/>
+                        <a:latin typeface="Calibri" panose="020F0502020204030204" pitchFamily="34" charset="0"/>
+                        <a:ea typeface="Calibri" panose="020F0502020204030204" pitchFamily="34" charset="0"/>
+                        <a:cs typeface="Times New Roman" panose="02020603050405020304" pitchFamily="18" charset="0"/>
+                      </a:endParaRPr>
+                    </a:p>
+                  </a:txBody>
+                  <a:tcPr marL="68580" marR="68580" marT="0" marB="0"/>
+                </a:tc>
+                <a:extLst>
+                  <a:ext uri="{0D108BD9-81ED-4DB2-BD59-A6C34878D82A}">
+                    <a16:rowId xmlns:a16="http://schemas.microsoft.com/office/drawing/2014/main" val="2124098922"/>
+                  </a:ext>
+                </a:extLst>
+              </a:tr>
+            </a:tbl>
+          </a:graphicData>
+        </a:graphic>
+      </p:graphicFrame>
+    </p:spTree>
+    <p:extLst>
+      <p:ext uri="{BB962C8B-B14F-4D97-AF65-F5344CB8AC3E}">
+        <p14:creationId xmlns:p14="http://schemas.microsoft.com/office/powerpoint/2010/main" val="2765594964"/>
+      </p:ext>
+    </p:extLst>
+  </p:cSld>
+  <p:clrMapOvr>
+    <a:masterClrMapping/>
+  </p:clrMapOvr>
+</p:sld>
+</file>
+
+<file path=ppt/slides/slide7.xml><?xml version="1.0" encoding="utf-8"?>
 <p:sld xmlns:a="http://schemas.openxmlformats.org/drawingml/2006/main" xmlns:r="http://schemas.openxmlformats.org/officeDocument/2006/relationships" xmlns:p="http://schemas.openxmlformats.org/presentationml/2006/main">
   <p:cSld>
     <p:spTree>
